--- a/contents/figs/figs.pptx
+++ b/contents/figs/figs.pptx
@@ -265,7 +265,7 @@
           <a:p>
             <a:fld id="{FC3F6E39-3D6E-514F-AE84-E4684E1D813A}" type="datetimeFigureOut">
               <a:rPr kumimoji="1" lang="ja-JP" altLang="en-US" smtClean="0"/>
-              <a:t>2026/5/20</a:t>
+              <a:t>2026/6/7</a:t>
             </a:fld>
             <a:endParaRPr kumimoji="1" lang="ja-JP" altLang="en-US"/>
           </a:p>
@@ -495,7 +495,7 @@
           <a:p>
             <a:fld id="{FC3F6E39-3D6E-514F-AE84-E4684E1D813A}" type="datetimeFigureOut">
               <a:rPr kumimoji="1" lang="ja-JP" altLang="en-US" smtClean="0"/>
-              <a:t>2026/5/20</a:t>
+              <a:t>2026/6/7</a:t>
             </a:fld>
             <a:endParaRPr kumimoji="1" lang="ja-JP" altLang="en-US"/>
           </a:p>
@@ -735,7 +735,7 @@
           <a:p>
             <a:fld id="{FC3F6E39-3D6E-514F-AE84-E4684E1D813A}" type="datetimeFigureOut">
               <a:rPr kumimoji="1" lang="ja-JP" altLang="en-US" smtClean="0"/>
-              <a:t>2026/5/20</a:t>
+              <a:t>2026/6/7</a:t>
             </a:fld>
             <a:endParaRPr kumimoji="1" lang="ja-JP" altLang="en-US"/>
           </a:p>
@@ -965,7 +965,7 @@
           <a:p>
             <a:fld id="{FC3F6E39-3D6E-514F-AE84-E4684E1D813A}" type="datetimeFigureOut">
               <a:rPr kumimoji="1" lang="ja-JP" altLang="en-US" smtClean="0"/>
-              <a:t>2026/5/20</a:t>
+              <a:t>2026/6/7</a:t>
             </a:fld>
             <a:endParaRPr kumimoji="1" lang="ja-JP" altLang="en-US"/>
           </a:p>
@@ -1240,7 +1240,7 @@
           <a:p>
             <a:fld id="{FC3F6E39-3D6E-514F-AE84-E4684E1D813A}" type="datetimeFigureOut">
               <a:rPr kumimoji="1" lang="ja-JP" altLang="en-US" smtClean="0"/>
-              <a:t>2026/5/20</a:t>
+              <a:t>2026/6/7</a:t>
             </a:fld>
             <a:endParaRPr kumimoji="1" lang="ja-JP" altLang="en-US"/>
           </a:p>
@@ -1569,7 +1569,7 @@
           <a:p>
             <a:fld id="{FC3F6E39-3D6E-514F-AE84-E4684E1D813A}" type="datetimeFigureOut">
               <a:rPr kumimoji="1" lang="ja-JP" altLang="en-US" smtClean="0"/>
-              <a:t>2026/5/20</a:t>
+              <a:t>2026/6/7</a:t>
             </a:fld>
             <a:endParaRPr kumimoji="1" lang="ja-JP" altLang="en-US"/>
           </a:p>
@@ -2045,7 +2045,7 @@
           <a:p>
             <a:fld id="{FC3F6E39-3D6E-514F-AE84-E4684E1D813A}" type="datetimeFigureOut">
               <a:rPr kumimoji="1" lang="ja-JP" altLang="en-US" smtClean="0"/>
-              <a:t>2026/5/20</a:t>
+              <a:t>2026/6/7</a:t>
             </a:fld>
             <a:endParaRPr kumimoji="1" lang="ja-JP" altLang="en-US"/>
           </a:p>
@@ -2186,7 +2186,7 @@
           <a:p>
             <a:fld id="{FC3F6E39-3D6E-514F-AE84-E4684E1D813A}" type="datetimeFigureOut">
               <a:rPr kumimoji="1" lang="ja-JP" altLang="en-US" smtClean="0"/>
-              <a:t>2026/5/20</a:t>
+              <a:t>2026/6/7</a:t>
             </a:fld>
             <a:endParaRPr kumimoji="1" lang="ja-JP" altLang="en-US"/>
           </a:p>
@@ -2299,7 +2299,7 @@
           <a:p>
             <a:fld id="{FC3F6E39-3D6E-514F-AE84-E4684E1D813A}" type="datetimeFigureOut">
               <a:rPr kumimoji="1" lang="ja-JP" altLang="en-US" smtClean="0"/>
-              <a:t>2026/5/20</a:t>
+              <a:t>2026/6/7</a:t>
             </a:fld>
             <a:endParaRPr kumimoji="1" lang="ja-JP" altLang="en-US"/>
           </a:p>
@@ -2642,7 +2642,7 @@
           <a:p>
             <a:fld id="{FC3F6E39-3D6E-514F-AE84-E4684E1D813A}" type="datetimeFigureOut">
               <a:rPr kumimoji="1" lang="ja-JP" altLang="en-US" smtClean="0"/>
-              <a:t>2026/5/20</a:t>
+              <a:t>2026/6/7</a:t>
             </a:fld>
             <a:endParaRPr kumimoji="1" lang="ja-JP" altLang="en-US"/>
           </a:p>
@@ -2930,7 +2930,7 @@
           <a:p>
             <a:fld id="{FC3F6E39-3D6E-514F-AE84-E4684E1D813A}" type="datetimeFigureOut">
               <a:rPr kumimoji="1" lang="ja-JP" altLang="en-US" smtClean="0"/>
-              <a:t>2026/5/20</a:t>
+              <a:t>2026/6/7</a:t>
             </a:fld>
             <a:endParaRPr kumimoji="1" lang="ja-JP" altLang="en-US"/>
           </a:p>
@@ -3203,7 +3203,7 @@
           <a:p>
             <a:fld id="{FC3F6E39-3D6E-514F-AE84-E4684E1D813A}" type="datetimeFigureOut">
               <a:rPr kumimoji="1" lang="ja-JP" altLang="en-US" smtClean="0"/>
-              <a:t>2026/5/20</a:t>
+              <a:t>2026/6/7</a:t>
             </a:fld>
             <a:endParaRPr kumimoji="1" lang="ja-JP" altLang="en-US"/>
           </a:p>
@@ -5548,6 +5548,2257 @@
           <a:chExt cx="0" cy="0"/>
         </a:xfrm>
       </p:grpSpPr>
+      <p:grpSp>
+        <p:nvGrpSpPr>
+          <p:cNvPr id="16" name="グループ化 15">
+            <a:extLst>
+              <a:ext uri="{FF2B5EF4-FFF2-40B4-BE49-F238E27FC236}">
+                <a16:creationId xmlns:a16="http://schemas.microsoft.com/office/drawing/2014/main" id="{75297351-5184-D145-4BD2-179D6D4ED530}"/>
+              </a:ext>
+            </a:extLst>
+          </p:cNvPr>
+          <p:cNvGrpSpPr/>
+          <p:nvPr/>
+        </p:nvGrpSpPr>
+        <p:grpSpPr>
+          <a:xfrm>
+            <a:off x="6185984" y="3453889"/>
+            <a:ext cx="1742820" cy="805389"/>
+            <a:chOff x="3254828" y="5139220"/>
+            <a:chExt cx="2744266" cy="1268176"/>
+          </a:xfrm>
+        </p:grpSpPr>
+        <p:sp>
+          <p:nvSpPr>
+            <p:cNvPr id="14" name="フリーフォーム 13">
+              <a:extLst>
+                <a:ext uri="{FF2B5EF4-FFF2-40B4-BE49-F238E27FC236}">
+                  <a16:creationId xmlns:a16="http://schemas.microsoft.com/office/drawing/2014/main" id="{928C5FC0-1C03-36B8-098A-A7010FF8F081}"/>
+                </a:ext>
+              </a:extLst>
+            </p:cNvPr>
+            <p:cNvSpPr/>
+            <p:nvPr/>
+          </p:nvSpPr>
+          <p:spPr>
+            <a:xfrm rot="10800000">
+              <a:off x="3254828" y="5139220"/>
+              <a:ext cx="2744266" cy="1268176"/>
+            </a:xfrm>
+            <a:custGeom>
+              <a:avLst/>
+              <a:gdLst>
+                <a:gd name="csX0" fmla="*/ 1419283 w 2744266"/>
+                <a:gd name="csY0" fmla="*/ 1268176 h 1268176"/>
+                <a:gd name="csX1" fmla="*/ 818940 w 2744266"/>
+                <a:gd name="csY1" fmla="*/ 951579 h 1268176"/>
+                <a:gd name="csX2" fmla="*/ 698578 w 2744266"/>
+                <a:gd name="csY2" fmla="*/ 942998 h 1268176"/>
+                <a:gd name="csX3" fmla="*/ 0 w 2744266"/>
+                <a:gd name="csY3" fmla="*/ 783625 h 1268176"/>
+                <a:gd name="csX4" fmla="*/ 379697 w 2744266"/>
+                <a:gd name="csY4" fmla="*/ 567210 h 1268176"/>
+                <a:gd name="csX5" fmla="*/ 43544 w 2744266"/>
+                <a:gd name="csY5" fmla="*/ 437882 h 1268176"/>
+                <a:gd name="csX6" fmla="*/ 1062231 w 2744266"/>
+                <a:gd name="csY6" fmla="*/ 229205 h 1268176"/>
+                <a:gd name="csX7" fmla="*/ 1285539 w 2744266"/>
+                <a:gd name="csY7" fmla="*/ 215668 h 1268176"/>
+                <a:gd name="csX8" fmla="*/ 1371250 w 2744266"/>
+                <a:gd name="csY8" fmla="*/ 0 h 1268176"/>
+                <a:gd name="csX9" fmla="*/ 1751754 w 2744266"/>
+                <a:gd name="csY9" fmla="*/ 200663 h 1268176"/>
+                <a:gd name="csX10" fmla="*/ 1888537 w 2744266"/>
+                <a:gd name="csY10" fmla="*/ 202372 h 1268176"/>
+                <a:gd name="csX11" fmla="*/ 2207199 w 2744266"/>
+                <a:gd name="csY11" fmla="*/ 231055 h 1268176"/>
+                <a:gd name="csX12" fmla="*/ 2418460 w 2744266"/>
+                <a:gd name="csY12" fmla="*/ 363281 h 1268176"/>
+                <a:gd name="csX13" fmla="*/ 2432944 w 2744266"/>
+                <a:gd name="csY13" fmla="*/ 389493 h 1268176"/>
+                <a:gd name="csX14" fmla="*/ 2744266 w 2744266"/>
+                <a:gd name="csY14" fmla="*/ 32460 h 1268176"/>
+                <a:gd name="csX15" fmla="*/ 2744265 w 2744266"/>
+                <a:gd name="csY15" fmla="*/ 1131918 h 1268176"/>
+                <a:gd name="csX16" fmla="*/ 2445564 w 2744266"/>
+                <a:gd name="csY16" fmla="*/ 789358 h 1268176"/>
+                <a:gd name="csX17" fmla="*/ 2441422 w 2744266"/>
+                <a:gd name="csY17" fmla="*/ 798695 h 1268176"/>
+                <a:gd name="csX18" fmla="*/ 2239854 w 2744266"/>
+                <a:gd name="csY18" fmla="*/ 936023 h 1268176"/>
+                <a:gd name="csX19" fmla="*/ 1762482 w 2744266"/>
+                <a:gd name="csY19" fmla="*/ 978862 h 1268176"/>
+                <a:gd name="csX20" fmla="*/ 1533854 w 2744266"/>
+                <a:gd name="csY20" fmla="*/ 979892 h 1268176"/>
+              </a:gdLst>
+              <a:ahLst/>
+              <a:cxnLst>
+                <a:cxn ang="0">
+                  <a:pos x="csX0" y="csY0"/>
+                </a:cxn>
+                <a:cxn ang="0">
+                  <a:pos x="csX1" y="csY1"/>
+                </a:cxn>
+                <a:cxn ang="0">
+                  <a:pos x="csX2" y="csY2"/>
+                </a:cxn>
+                <a:cxn ang="0">
+                  <a:pos x="csX3" y="csY3"/>
+                </a:cxn>
+                <a:cxn ang="0">
+                  <a:pos x="csX4" y="csY4"/>
+                </a:cxn>
+                <a:cxn ang="0">
+                  <a:pos x="csX5" y="csY5"/>
+                </a:cxn>
+                <a:cxn ang="0">
+                  <a:pos x="csX6" y="csY6"/>
+                </a:cxn>
+                <a:cxn ang="0">
+                  <a:pos x="csX7" y="csY7"/>
+                </a:cxn>
+                <a:cxn ang="0">
+                  <a:pos x="csX8" y="csY8"/>
+                </a:cxn>
+                <a:cxn ang="0">
+                  <a:pos x="csX9" y="csY9"/>
+                </a:cxn>
+                <a:cxn ang="0">
+                  <a:pos x="csX10" y="csY10"/>
+                </a:cxn>
+                <a:cxn ang="0">
+                  <a:pos x="csX11" y="csY11"/>
+                </a:cxn>
+                <a:cxn ang="0">
+                  <a:pos x="csX12" y="csY12"/>
+                </a:cxn>
+                <a:cxn ang="0">
+                  <a:pos x="csX13" y="csY13"/>
+                </a:cxn>
+                <a:cxn ang="0">
+                  <a:pos x="csX14" y="csY14"/>
+                </a:cxn>
+                <a:cxn ang="0">
+                  <a:pos x="csX15" y="csY15"/>
+                </a:cxn>
+                <a:cxn ang="0">
+                  <a:pos x="csX16" y="csY16"/>
+                </a:cxn>
+                <a:cxn ang="0">
+                  <a:pos x="csX17" y="csY17"/>
+                </a:cxn>
+                <a:cxn ang="0">
+                  <a:pos x="csX18" y="csY18"/>
+                </a:cxn>
+                <a:cxn ang="0">
+                  <a:pos x="csX19" y="csY19"/>
+                </a:cxn>
+                <a:cxn ang="0">
+                  <a:pos x="csX20" y="csY20"/>
+                </a:cxn>
+              </a:cxnLst>
+              <a:rect l="l" t="t" r="r" b="b"/>
+              <a:pathLst>
+                <a:path w="2744266" h="1268176">
+                  <a:moveTo>
+                    <a:pt x="1419283" y="1268176"/>
+                  </a:moveTo>
+                  <a:lnTo>
+                    <a:pt x="818940" y="951579"/>
+                  </a:lnTo>
+                  <a:lnTo>
+                    <a:pt x="698578" y="942998"/>
+                  </a:lnTo>
+                  <a:cubicBezTo>
+                    <a:pt x="355910" y="910668"/>
+                    <a:pt x="74130" y="857754"/>
+                    <a:pt x="0" y="783625"/>
+                  </a:cubicBezTo>
+                  <a:cubicBezTo>
+                    <a:pt x="119310" y="664315"/>
+                    <a:pt x="260388" y="686519"/>
+                    <a:pt x="379697" y="567210"/>
+                  </a:cubicBezTo>
+                  <a:lnTo>
+                    <a:pt x="43544" y="437882"/>
+                  </a:lnTo>
+                  <a:cubicBezTo>
+                    <a:pt x="142383" y="339043"/>
+                    <a:pt x="591784" y="266580"/>
+                    <a:pt x="1062231" y="229205"/>
+                  </a:cubicBezTo>
+                  <a:lnTo>
+                    <a:pt x="1285539" y="215668"/>
+                  </a:lnTo>
+                  <a:lnTo>
+                    <a:pt x="1371250" y="0"/>
+                  </a:lnTo>
+                  <a:lnTo>
+                    <a:pt x="1751754" y="200663"/>
+                  </a:lnTo>
+                  <a:lnTo>
+                    <a:pt x="1888537" y="202372"/>
+                  </a:lnTo>
+                  <a:cubicBezTo>
+                    <a:pt x="2026551" y="206080"/>
+                    <a:pt x="2138564" y="215488"/>
+                    <a:pt x="2207199" y="231055"/>
+                  </a:cubicBezTo>
+                  <a:cubicBezTo>
+                    <a:pt x="2298712" y="251811"/>
+                    <a:pt x="2369501" y="300493"/>
+                    <a:pt x="2418460" y="363281"/>
+                  </a:cubicBezTo>
+                  <a:lnTo>
+                    <a:pt x="2432944" y="389493"/>
+                  </a:lnTo>
+                  <a:lnTo>
+                    <a:pt x="2744266" y="32460"/>
+                  </a:lnTo>
+                  <a:lnTo>
+                    <a:pt x="2744265" y="1131918"/>
+                  </a:lnTo>
+                  <a:lnTo>
+                    <a:pt x="2445564" y="789358"/>
+                  </a:lnTo>
+                  <a:lnTo>
+                    <a:pt x="2441422" y="798695"/>
+                  </a:lnTo>
+                  <a:cubicBezTo>
+                    <a:pt x="2398642" y="862616"/>
+                    <a:pt x="2331821" y="912999"/>
+                    <a:pt x="2239854" y="936023"/>
+                  </a:cubicBezTo>
+                  <a:cubicBezTo>
+                    <a:pt x="2147888" y="959047"/>
+                    <a:pt x="1974268" y="973389"/>
+                    <a:pt x="1762482" y="978862"/>
+                  </a:cubicBezTo>
+                  <a:lnTo>
+                    <a:pt x="1533854" y="979892"/>
+                  </a:lnTo>
+                  <a:close/>
+                </a:path>
+              </a:pathLst>
+            </a:custGeom>
+            <a:solidFill>
+              <a:srgbClr val="0070C0"/>
+            </a:solidFill>
+            <a:ln>
+              <a:noFill/>
+            </a:ln>
+          </p:spPr>
+          <p:style>
+            <a:lnRef idx="2">
+              <a:schemeClr val="accent1">
+                <a:shade val="15000"/>
+              </a:schemeClr>
+            </a:lnRef>
+            <a:fillRef idx="1">
+              <a:schemeClr val="accent1"/>
+            </a:fillRef>
+            <a:effectRef idx="0">
+              <a:schemeClr val="accent1"/>
+            </a:effectRef>
+            <a:fontRef idx="minor">
+              <a:schemeClr val="lt1"/>
+            </a:fontRef>
+          </p:style>
+          <p:txBody>
+            <a:bodyPr wrap="square" rtlCol="0" anchor="ctr">
+              <a:noAutofit/>
+            </a:bodyPr>
+            <a:lstStyle/>
+            <a:p>
+              <a:pPr algn="ctr"/>
+              <a:endParaRPr kumimoji="1" lang="ja-JP" altLang="en-US"/>
+            </a:p>
+          </p:txBody>
+        </p:sp>
+        <p:sp>
+          <p:nvSpPr>
+            <p:cNvPr id="15" name="円/楕円 14">
+              <a:extLst>
+                <a:ext uri="{FF2B5EF4-FFF2-40B4-BE49-F238E27FC236}">
+                  <a16:creationId xmlns:a16="http://schemas.microsoft.com/office/drawing/2014/main" id="{156EAA35-7E18-3E7C-4F61-06E5419B9213}"/>
+                </a:ext>
+              </a:extLst>
+            </p:cNvPr>
+            <p:cNvSpPr/>
+            <p:nvPr/>
+          </p:nvSpPr>
+          <p:spPr>
+            <a:xfrm>
+              <a:off x="5584371" y="5575023"/>
+              <a:ext cx="107320" cy="107320"/>
+            </a:xfrm>
+            <a:prstGeom prst="ellipse">
+              <a:avLst/>
+            </a:prstGeom>
+            <a:solidFill>
+              <a:schemeClr val="tx1"/>
+            </a:solidFill>
+            <a:ln>
+              <a:noFill/>
+            </a:ln>
+          </p:spPr>
+          <p:style>
+            <a:lnRef idx="2">
+              <a:schemeClr val="accent1">
+                <a:shade val="15000"/>
+              </a:schemeClr>
+            </a:lnRef>
+            <a:fillRef idx="1">
+              <a:schemeClr val="accent1"/>
+            </a:fillRef>
+            <a:effectRef idx="0">
+              <a:schemeClr val="accent1"/>
+            </a:effectRef>
+            <a:fontRef idx="minor">
+              <a:schemeClr val="lt1"/>
+            </a:fontRef>
+          </p:style>
+          <p:txBody>
+            <a:bodyPr rtlCol="0" anchor="ctr"/>
+            <a:lstStyle/>
+            <a:p>
+              <a:pPr algn="ctr"/>
+              <a:endParaRPr kumimoji="1" lang="ja-JP" altLang="en-US"/>
+            </a:p>
+          </p:txBody>
+        </p:sp>
+      </p:grpSp>
+      <p:grpSp>
+        <p:nvGrpSpPr>
+          <p:cNvPr id="38" name="グループ化 37">
+            <a:extLst>
+              <a:ext uri="{FF2B5EF4-FFF2-40B4-BE49-F238E27FC236}">
+                <a16:creationId xmlns:a16="http://schemas.microsoft.com/office/drawing/2014/main" id="{8E3DB4EF-040F-06C6-26B1-8B391ADC04A0}"/>
+              </a:ext>
+            </a:extLst>
+          </p:cNvPr>
+          <p:cNvGrpSpPr/>
+          <p:nvPr/>
+        </p:nvGrpSpPr>
+        <p:grpSpPr>
+          <a:xfrm>
+            <a:off x="4235271" y="3064142"/>
+            <a:ext cx="2827830" cy="2646748"/>
+            <a:chOff x="2967790" y="3232209"/>
+            <a:chExt cx="1840830" cy="1722951"/>
+          </a:xfrm>
+        </p:grpSpPr>
+        <p:grpSp>
+          <p:nvGrpSpPr>
+            <p:cNvPr id="39" name="グループ化 38">
+              <a:extLst>
+                <a:ext uri="{FF2B5EF4-FFF2-40B4-BE49-F238E27FC236}">
+                  <a16:creationId xmlns:a16="http://schemas.microsoft.com/office/drawing/2014/main" id="{F8C82ECD-787A-01DC-C9E4-86662987F8F1}"/>
+                </a:ext>
+              </a:extLst>
+            </p:cNvPr>
+            <p:cNvGrpSpPr/>
+            <p:nvPr/>
+          </p:nvGrpSpPr>
+          <p:grpSpPr>
+            <a:xfrm>
+              <a:off x="2967790" y="3232209"/>
+              <a:ext cx="1840830" cy="1722951"/>
+              <a:chOff x="3112169" y="3232209"/>
+              <a:chExt cx="1840830" cy="1722951"/>
+            </a:xfrm>
+          </p:grpSpPr>
+          <p:sp>
+            <p:nvSpPr>
+              <p:cNvPr id="42" name="フリーフォーム 41">
+                <a:extLst>
+                  <a:ext uri="{FF2B5EF4-FFF2-40B4-BE49-F238E27FC236}">
+                    <a16:creationId xmlns:a16="http://schemas.microsoft.com/office/drawing/2014/main" id="{9C121FAF-9D20-4B54-34A5-620A0DA94D94}"/>
+                  </a:ext>
+                </a:extLst>
+              </p:cNvPr>
+              <p:cNvSpPr/>
+              <p:nvPr/>
+            </p:nvSpPr>
+            <p:spPr>
+              <a:xfrm>
+                <a:off x="3280610" y="3232209"/>
+                <a:ext cx="1511968" cy="1722951"/>
+              </a:xfrm>
+              <a:custGeom>
+                <a:avLst/>
+                <a:gdLst>
+                  <a:gd name="csX0" fmla="*/ 315568 w 1511968"/>
+                  <a:gd name="csY0" fmla="*/ 0 h 1642741"/>
+                  <a:gd name="csX1" fmla="*/ 555337 w 1511968"/>
+                  <a:gd name="csY1" fmla="*/ 239769 h 1642741"/>
+                  <a:gd name="csX2" fmla="*/ 603627 w 1511968"/>
+                  <a:gd name="csY2" fmla="*/ 225575 h 1642741"/>
+                  <a:gd name="csX3" fmla="*/ 755984 w 1511968"/>
+                  <a:gd name="csY3" fmla="*/ 211031 h 1642741"/>
+                  <a:gd name="csX4" fmla="*/ 908341 w 1511968"/>
+                  <a:gd name="csY4" fmla="*/ 225575 h 1642741"/>
+                  <a:gd name="csX5" fmla="*/ 970828 w 1511968"/>
+                  <a:gd name="csY5" fmla="*/ 243942 h 1642741"/>
+                  <a:gd name="csX6" fmla="*/ 1214770 w 1511968"/>
+                  <a:gd name="csY6" fmla="*/ 0 h 1642741"/>
+                  <a:gd name="csX7" fmla="*/ 1401001 w 1511968"/>
+                  <a:gd name="csY7" fmla="*/ 449601 h 1642741"/>
+                  <a:gd name="csX8" fmla="*/ 1392075 w 1511968"/>
+                  <a:gd name="csY8" fmla="*/ 542725 h 1642741"/>
+                  <a:gd name="csX9" fmla="*/ 1452559 w 1511968"/>
+                  <a:gd name="csY9" fmla="*/ 648243 h 1642741"/>
+                  <a:gd name="csX10" fmla="*/ 1511968 w 1511968"/>
+                  <a:gd name="csY10" fmla="*/ 926886 h 1642741"/>
+                  <a:gd name="csX11" fmla="*/ 755984 w 1511968"/>
+                  <a:gd name="csY11" fmla="*/ 1642741 h 1642741"/>
+                  <a:gd name="csX12" fmla="*/ 0 w 1511968"/>
+                  <a:gd name="csY12" fmla="*/ 926886 h 1642741"/>
+                  <a:gd name="csX13" fmla="*/ 129111 w 1511968"/>
+                  <a:gd name="csY13" fmla="*/ 526645 h 1642741"/>
+                  <a:gd name="csX14" fmla="*/ 135968 w 1511968"/>
+                  <a:gd name="csY14" fmla="*/ 518775 h 1642741"/>
+                  <a:gd name="csX15" fmla="*/ 129338 w 1511968"/>
+                  <a:gd name="csY15" fmla="*/ 449601 h 1642741"/>
+                  <a:gd name="csX16" fmla="*/ 315568 w 1511968"/>
+                  <a:gd name="csY16" fmla="*/ 0 h 1642741"/>
+                  <a:gd name="csX0" fmla="*/ 74937 w 1511968"/>
+                  <a:gd name="csY0" fmla="*/ 0 h 1682846"/>
+                  <a:gd name="csX1" fmla="*/ 555337 w 1511968"/>
+                  <a:gd name="csY1" fmla="*/ 279874 h 1682846"/>
+                  <a:gd name="csX2" fmla="*/ 603627 w 1511968"/>
+                  <a:gd name="csY2" fmla="*/ 265680 h 1682846"/>
+                  <a:gd name="csX3" fmla="*/ 755984 w 1511968"/>
+                  <a:gd name="csY3" fmla="*/ 251136 h 1682846"/>
+                  <a:gd name="csX4" fmla="*/ 908341 w 1511968"/>
+                  <a:gd name="csY4" fmla="*/ 265680 h 1682846"/>
+                  <a:gd name="csX5" fmla="*/ 970828 w 1511968"/>
+                  <a:gd name="csY5" fmla="*/ 284047 h 1682846"/>
+                  <a:gd name="csX6" fmla="*/ 1214770 w 1511968"/>
+                  <a:gd name="csY6" fmla="*/ 40105 h 1682846"/>
+                  <a:gd name="csX7" fmla="*/ 1401001 w 1511968"/>
+                  <a:gd name="csY7" fmla="*/ 489706 h 1682846"/>
+                  <a:gd name="csX8" fmla="*/ 1392075 w 1511968"/>
+                  <a:gd name="csY8" fmla="*/ 582830 h 1682846"/>
+                  <a:gd name="csX9" fmla="*/ 1452559 w 1511968"/>
+                  <a:gd name="csY9" fmla="*/ 688348 h 1682846"/>
+                  <a:gd name="csX10" fmla="*/ 1511968 w 1511968"/>
+                  <a:gd name="csY10" fmla="*/ 966991 h 1682846"/>
+                  <a:gd name="csX11" fmla="*/ 755984 w 1511968"/>
+                  <a:gd name="csY11" fmla="*/ 1682846 h 1682846"/>
+                  <a:gd name="csX12" fmla="*/ 0 w 1511968"/>
+                  <a:gd name="csY12" fmla="*/ 966991 h 1682846"/>
+                  <a:gd name="csX13" fmla="*/ 129111 w 1511968"/>
+                  <a:gd name="csY13" fmla="*/ 566750 h 1682846"/>
+                  <a:gd name="csX14" fmla="*/ 135968 w 1511968"/>
+                  <a:gd name="csY14" fmla="*/ 558880 h 1682846"/>
+                  <a:gd name="csX15" fmla="*/ 129338 w 1511968"/>
+                  <a:gd name="csY15" fmla="*/ 489706 h 1682846"/>
+                  <a:gd name="csX16" fmla="*/ 74937 w 1511968"/>
+                  <a:gd name="csY16" fmla="*/ 0 h 1682846"/>
+                  <a:gd name="csX0" fmla="*/ 74937 w 1511968"/>
+                  <a:gd name="csY0" fmla="*/ 0 h 1682846"/>
+                  <a:gd name="csX1" fmla="*/ 443042 w 1511968"/>
+                  <a:gd name="csY1" fmla="*/ 352063 h 1682846"/>
+                  <a:gd name="csX2" fmla="*/ 603627 w 1511968"/>
+                  <a:gd name="csY2" fmla="*/ 265680 h 1682846"/>
+                  <a:gd name="csX3" fmla="*/ 755984 w 1511968"/>
+                  <a:gd name="csY3" fmla="*/ 251136 h 1682846"/>
+                  <a:gd name="csX4" fmla="*/ 908341 w 1511968"/>
+                  <a:gd name="csY4" fmla="*/ 265680 h 1682846"/>
+                  <a:gd name="csX5" fmla="*/ 970828 w 1511968"/>
+                  <a:gd name="csY5" fmla="*/ 284047 h 1682846"/>
+                  <a:gd name="csX6" fmla="*/ 1214770 w 1511968"/>
+                  <a:gd name="csY6" fmla="*/ 40105 h 1682846"/>
+                  <a:gd name="csX7" fmla="*/ 1401001 w 1511968"/>
+                  <a:gd name="csY7" fmla="*/ 489706 h 1682846"/>
+                  <a:gd name="csX8" fmla="*/ 1392075 w 1511968"/>
+                  <a:gd name="csY8" fmla="*/ 582830 h 1682846"/>
+                  <a:gd name="csX9" fmla="*/ 1452559 w 1511968"/>
+                  <a:gd name="csY9" fmla="*/ 688348 h 1682846"/>
+                  <a:gd name="csX10" fmla="*/ 1511968 w 1511968"/>
+                  <a:gd name="csY10" fmla="*/ 966991 h 1682846"/>
+                  <a:gd name="csX11" fmla="*/ 755984 w 1511968"/>
+                  <a:gd name="csY11" fmla="*/ 1682846 h 1682846"/>
+                  <a:gd name="csX12" fmla="*/ 0 w 1511968"/>
+                  <a:gd name="csY12" fmla="*/ 966991 h 1682846"/>
+                  <a:gd name="csX13" fmla="*/ 129111 w 1511968"/>
+                  <a:gd name="csY13" fmla="*/ 566750 h 1682846"/>
+                  <a:gd name="csX14" fmla="*/ 135968 w 1511968"/>
+                  <a:gd name="csY14" fmla="*/ 558880 h 1682846"/>
+                  <a:gd name="csX15" fmla="*/ 129338 w 1511968"/>
+                  <a:gd name="csY15" fmla="*/ 489706 h 1682846"/>
+                  <a:gd name="csX16" fmla="*/ 74937 w 1511968"/>
+                  <a:gd name="csY16" fmla="*/ 0 h 1682846"/>
+                  <a:gd name="csX0" fmla="*/ 74937 w 1511968"/>
+                  <a:gd name="csY0" fmla="*/ 0 h 1682846"/>
+                  <a:gd name="csX1" fmla="*/ 443042 w 1511968"/>
+                  <a:gd name="csY1" fmla="*/ 352063 h 1682846"/>
+                  <a:gd name="csX2" fmla="*/ 531438 w 1511968"/>
+                  <a:gd name="csY2" fmla="*/ 305785 h 1682846"/>
+                  <a:gd name="csX3" fmla="*/ 755984 w 1511968"/>
+                  <a:gd name="csY3" fmla="*/ 251136 h 1682846"/>
+                  <a:gd name="csX4" fmla="*/ 908341 w 1511968"/>
+                  <a:gd name="csY4" fmla="*/ 265680 h 1682846"/>
+                  <a:gd name="csX5" fmla="*/ 970828 w 1511968"/>
+                  <a:gd name="csY5" fmla="*/ 284047 h 1682846"/>
+                  <a:gd name="csX6" fmla="*/ 1214770 w 1511968"/>
+                  <a:gd name="csY6" fmla="*/ 40105 h 1682846"/>
+                  <a:gd name="csX7" fmla="*/ 1401001 w 1511968"/>
+                  <a:gd name="csY7" fmla="*/ 489706 h 1682846"/>
+                  <a:gd name="csX8" fmla="*/ 1392075 w 1511968"/>
+                  <a:gd name="csY8" fmla="*/ 582830 h 1682846"/>
+                  <a:gd name="csX9" fmla="*/ 1452559 w 1511968"/>
+                  <a:gd name="csY9" fmla="*/ 688348 h 1682846"/>
+                  <a:gd name="csX10" fmla="*/ 1511968 w 1511968"/>
+                  <a:gd name="csY10" fmla="*/ 966991 h 1682846"/>
+                  <a:gd name="csX11" fmla="*/ 755984 w 1511968"/>
+                  <a:gd name="csY11" fmla="*/ 1682846 h 1682846"/>
+                  <a:gd name="csX12" fmla="*/ 0 w 1511968"/>
+                  <a:gd name="csY12" fmla="*/ 966991 h 1682846"/>
+                  <a:gd name="csX13" fmla="*/ 129111 w 1511968"/>
+                  <a:gd name="csY13" fmla="*/ 566750 h 1682846"/>
+                  <a:gd name="csX14" fmla="*/ 135968 w 1511968"/>
+                  <a:gd name="csY14" fmla="*/ 558880 h 1682846"/>
+                  <a:gd name="csX15" fmla="*/ 129338 w 1511968"/>
+                  <a:gd name="csY15" fmla="*/ 489706 h 1682846"/>
+                  <a:gd name="csX16" fmla="*/ 74937 w 1511968"/>
+                  <a:gd name="csY16" fmla="*/ 0 h 1682846"/>
+                  <a:gd name="csX0" fmla="*/ 74937 w 1511968"/>
+                  <a:gd name="csY0" fmla="*/ 0 h 1682846"/>
+                  <a:gd name="csX1" fmla="*/ 443042 w 1511968"/>
+                  <a:gd name="csY1" fmla="*/ 352063 h 1682846"/>
+                  <a:gd name="csX2" fmla="*/ 531438 w 1511968"/>
+                  <a:gd name="csY2" fmla="*/ 305785 h 1682846"/>
+                  <a:gd name="csX3" fmla="*/ 683794 w 1511968"/>
+                  <a:gd name="csY3" fmla="*/ 267179 h 1682846"/>
+                  <a:gd name="csX4" fmla="*/ 908341 w 1511968"/>
+                  <a:gd name="csY4" fmla="*/ 265680 h 1682846"/>
+                  <a:gd name="csX5" fmla="*/ 970828 w 1511968"/>
+                  <a:gd name="csY5" fmla="*/ 284047 h 1682846"/>
+                  <a:gd name="csX6" fmla="*/ 1214770 w 1511968"/>
+                  <a:gd name="csY6" fmla="*/ 40105 h 1682846"/>
+                  <a:gd name="csX7" fmla="*/ 1401001 w 1511968"/>
+                  <a:gd name="csY7" fmla="*/ 489706 h 1682846"/>
+                  <a:gd name="csX8" fmla="*/ 1392075 w 1511968"/>
+                  <a:gd name="csY8" fmla="*/ 582830 h 1682846"/>
+                  <a:gd name="csX9" fmla="*/ 1452559 w 1511968"/>
+                  <a:gd name="csY9" fmla="*/ 688348 h 1682846"/>
+                  <a:gd name="csX10" fmla="*/ 1511968 w 1511968"/>
+                  <a:gd name="csY10" fmla="*/ 966991 h 1682846"/>
+                  <a:gd name="csX11" fmla="*/ 755984 w 1511968"/>
+                  <a:gd name="csY11" fmla="*/ 1682846 h 1682846"/>
+                  <a:gd name="csX12" fmla="*/ 0 w 1511968"/>
+                  <a:gd name="csY12" fmla="*/ 966991 h 1682846"/>
+                  <a:gd name="csX13" fmla="*/ 129111 w 1511968"/>
+                  <a:gd name="csY13" fmla="*/ 566750 h 1682846"/>
+                  <a:gd name="csX14" fmla="*/ 135968 w 1511968"/>
+                  <a:gd name="csY14" fmla="*/ 558880 h 1682846"/>
+                  <a:gd name="csX15" fmla="*/ 129338 w 1511968"/>
+                  <a:gd name="csY15" fmla="*/ 489706 h 1682846"/>
+                  <a:gd name="csX16" fmla="*/ 74937 w 1511968"/>
+                  <a:gd name="csY16" fmla="*/ 0 h 1682846"/>
+                  <a:gd name="csX0" fmla="*/ 74937 w 1511968"/>
+                  <a:gd name="csY0" fmla="*/ 0 h 1682846"/>
+                  <a:gd name="csX1" fmla="*/ 443042 w 1511968"/>
+                  <a:gd name="csY1" fmla="*/ 352063 h 1682846"/>
+                  <a:gd name="csX2" fmla="*/ 531438 w 1511968"/>
+                  <a:gd name="csY2" fmla="*/ 305785 h 1682846"/>
+                  <a:gd name="csX3" fmla="*/ 683794 w 1511968"/>
+                  <a:gd name="csY3" fmla="*/ 267179 h 1682846"/>
+                  <a:gd name="csX4" fmla="*/ 844173 w 1511968"/>
+                  <a:gd name="csY4" fmla="*/ 273701 h 1682846"/>
+                  <a:gd name="csX5" fmla="*/ 970828 w 1511968"/>
+                  <a:gd name="csY5" fmla="*/ 284047 h 1682846"/>
+                  <a:gd name="csX6" fmla="*/ 1214770 w 1511968"/>
+                  <a:gd name="csY6" fmla="*/ 40105 h 1682846"/>
+                  <a:gd name="csX7" fmla="*/ 1401001 w 1511968"/>
+                  <a:gd name="csY7" fmla="*/ 489706 h 1682846"/>
+                  <a:gd name="csX8" fmla="*/ 1392075 w 1511968"/>
+                  <a:gd name="csY8" fmla="*/ 582830 h 1682846"/>
+                  <a:gd name="csX9" fmla="*/ 1452559 w 1511968"/>
+                  <a:gd name="csY9" fmla="*/ 688348 h 1682846"/>
+                  <a:gd name="csX10" fmla="*/ 1511968 w 1511968"/>
+                  <a:gd name="csY10" fmla="*/ 966991 h 1682846"/>
+                  <a:gd name="csX11" fmla="*/ 755984 w 1511968"/>
+                  <a:gd name="csY11" fmla="*/ 1682846 h 1682846"/>
+                  <a:gd name="csX12" fmla="*/ 0 w 1511968"/>
+                  <a:gd name="csY12" fmla="*/ 966991 h 1682846"/>
+                  <a:gd name="csX13" fmla="*/ 129111 w 1511968"/>
+                  <a:gd name="csY13" fmla="*/ 566750 h 1682846"/>
+                  <a:gd name="csX14" fmla="*/ 135968 w 1511968"/>
+                  <a:gd name="csY14" fmla="*/ 558880 h 1682846"/>
+                  <a:gd name="csX15" fmla="*/ 129338 w 1511968"/>
+                  <a:gd name="csY15" fmla="*/ 489706 h 1682846"/>
+                  <a:gd name="csX16" fmla="*/ 74937 w 1511968"/>
+                  <a:gd name="csY16" fmla="*/ 0 h 1682846"/>
+                  <a:gd name="csX0" fmla="*/ 74937 w 1511968"/>
+                  <a:gd name="csY0" fmla="*/ 40105 h 1722951"/>
+                  <a:gd name="csX1" fmla="*/ 443042 w 1511968"/>
+                  <a:gd name="csY1" fmla="*/ 392168 h 1722951"/>
+                  <a:gd name="csX2" fmla="*/ 531438 w 1511968"/>
+                  <a:gd name="csY2" fmla="*/ 345890 h 1722951"/>
+                  <a:gd name="csX3" fmla="*/ 683794 w 1511968"/>
+                  <a:gd name="csY3" fmla="*/ 307284 h 1722951"/>
+                  <a:gd name="csX4" fmla="*/ 844173 w 1511968"/>
+                  <a:gd name="csY4" fmla="*/ 313806 h 1722951"/>
+                  <a:gd name="csX5" fmla="*/ 970828 w 1511968"/>
+                  <a:gd name="csY5" fmla="*/ 324152 h 1722951"/>
+                  <a:gd name="csX6" fmla="*/ 1014244 w 1511968"/>
+                  <a:gd name="csY6" fmla="*/ 0 h 1722951"/>
+                  <a:gd name="csX7" fmla="*/ 1401001 w 1511968"/>
+                  <a:gd name="csY7" fmla="*/ 529811 h 1722951"/>
+                  <a:gd name="csX8" fmla="*/ 1392075 w 1511968"/>
+                  <a:gd name="csY8" fmla="*/ 622935 h 1722951"/>
+                  <a:gd name="csX9" fmla="*/ 1452559 w 1511968"/>
+                  <a:gd name="csY9" fmla="*/ 728453 h 1722951"/>
+                  <a:gd name="csX10" fmla="*/ 1511968 w 1511968"/>
+                  <a:gd name="csY10" fmla="*/ 1007096 h 1722951"/>
+                  <a:gd name="csX11" fmla="*/ 755984 w 1511968"/>
+                  <a:gd name="csY11" fmla="*/ 1722951 h 1722951"/>
+                  <a:gd name="csX12" fmla="*/ 0 w 1511968"/>
+                  <a:gd name="csY12" fmla="*/ 1007096 h 1722951"/>
+                  <a:gd name="csX13" fmla="*/ 129111 w 1511968"/>
+                  <a:gd name="csY13" fmla="*/ 606855 h 1722951"/>
+                  <a:gd name="csX14" fmla="*/ 135968 w 1511968"/>
+                  <a:gd name="csY14" fmla="*/ 598985 h 1722951"/>
+                  <a:gd name="csX15" fmla="*/ 129338 w 1511968"/>
+                  <a:gd name="csY15" fmla="*/ 529811 h 1722951"/>
+                  <a:gd name="csX16" fmla="*/ 74937 w 1511968"/>
+                  <a:gd name="csY16" fmla="*/ 40105 h 1722951"/>
+                  <a:gd name="csX0" fmla="*/ 74937 w 1511968"/>
+                  <a:gd name="csY0" fmla="*/ 40105 h 1722951"/>
+                  <a:gd name="csX1" fmla="*/ 443042 w 1511968"/>
+                  <a:gd name="csY1" fmla="*/ 392168 h 1722951"/>
+                  <a:gd name="csX2" fmla="*/ 531438 w 1511968"/>
+                  <a:gd name="csY2" fmla="*/ 345890 h 1722951"/>
+                  <a:gd name="csX3" fmla="*/ 683794 w 1511968"/>
+                  <a:gd name="csY3" fmla="*/ 307284 h 1722951"/>
+                  <a:gd name="csX4" fmla="*/ 844173 w 1511968"/>
+                  <a:gd name="csY4" fmla="*/ 313806 h 1722951"/>
+                  <a:gd name="csX5" fmla="*/ 970828 w 1511968"/>
+                  <a:gd name="csY5" fmla="*/ 324152 h 1722951"/>
+                  <a:gd name="csX6" fmla="*/ 1014244 w 1511968"/>
+                  <a:gd name="csY6" fmla="*/ 0 h 1722951"/>
+                  <a:gd name="csX7" fmla="*/ 1216517 w 1511968"/>
+                  <a:gd name="csY7" fmla="*/ 297201 h 1722951"/>
+                  <a:gd name="csX8" fmla="*/ 1392075 w 1511968"/>
+                  <a:gd name="csY8" fmla="*/ 622935 h 1722951"/>
+                  <a:gd name="csX9" fmla="*/ 1452559 w 1511968"/>
+                  <a:gd name="csY9" fmla="*/ 728453 h 1722951"/>
+                  <a:gd name="csX10" fmla="*/ 1511968 w 1511968"/>
+                  <a:gd name="csY10" fmla="*/ 1007096 h 1722951"/>
+                  <a:gd name="csX11" fmla="*/ 755984 w 1511968"/>
+                  <a:gd name="csY11" fmla="*/ 1722951 h 1722951"/>
+                  <a:gd name="csX12" fmla="*/ 0 w 1511968"/>
+                  <a:gd name="csY12" fmla="*/ 1007096 h 1722951"/>
+                  <a:gd name="csX13" fmla="*/ 129111 w 1511968"/>
+                  <a:gd name="csY13" fmla="*/ 606855 h 1722951"/>
+                  <a:gd name="csX14" fmla="*/ 135968 w 1511968"/>
+                  <a:gd name="csY14" fmla="*/ 598985 h 1722951"/>
+                  <a:gd name="csX15" fmla="*/ 129338 w 1511968"/>
+                  <a:gd name="csY15" fmla="*/ 529811 h 1722951"/>
+                  <a:gd name="csX16" fmla="*/ 74937 w 1511968"/>
+                  <a:gd name="csY16" fmla="*/ 40105 h 1722951"/>
+                  <a:gd name="csX0" fmla="*/ 74937 w 1511968"/>
+                  <a:gd name="csY0" fmla="*/ 40105 h 1722951"/>
+                  <a:gd name="csX1" fmla="*/ 443042 w 1511968"/>
+                  <a:gd name="csY1" fmla="*/ 392168 h 1722951"/>
+                  <a:gd name="csX2" fmla="*/ 531438 w 1511968"/>
+                  <a:gd name="csY2" fmla="*/ 345890 h 1722951"/>
+                  <a:gd name="csX3" fmla="*/ 683794 w 1511968"/>
+                  <a:gd name="csY3" fmla="*/ 307284 h 1722951"/>
+                  <a:gd name="csX4" fmla="*/ 844173 w 1511968"/>
+                  <a:gd name="csY4" fmla="*/ 313806 h 1722951"/>
+                  <a:gd name="csX5" fmla="*/ 970828 w 1511968"/>
+                  <a:gd name="csY5" fmla="*/ 324152 h 1722951"/>
+                  <a:gd name="csX6" fmla="*/ 1014244 w 1511968"/>
+                  <a:gd name="csY6" fmla="*/ 0 h 1722951"/>
+                  <a:gd name="csX7" fmla="*/ 1264643 w 1511968"/>
+                  <a:gd name="csY7" fmla="*/ 305222 h 1722951"/>
+                  <a:gd name="csX8" fmla="*/ 1392075 w 1511968"/>
+                  <a:gd name="csY8" fmla="*/ 622935 h 1722951"/>
+                  <a:gd name="csX9" fmla="*/ 1452559 w 1511968"/>
+                  <a:gd name="csY9" fmla="*/ 728453 h 1722951"/>
+                  <a:gd name="csX10" fmla="*/ 1511968 w 1511968"/>
+                  <a:gd name="csY10" fmla="*/ 1007096 h 1722951"/>
+                  <a:gd name="csX11" fmla="*/ 755984 w 1511968"/>
+                  <a:gd name="csY11" fmla="*/ 1722951 h 1722951"/>
+                  <a:gd name="csX12" fmla="*/ 0 w 1511968"/>
+                  <a:gd name="csY12" fmla="*/ 1007096 h 1722951"/>
+                  <a:gd name="csX13" fmla="*/ 129111 w 1511968"/>
+                  <a:gd name="csY13" fmla="*/ 606855 h 1722951"/>
+                  <a:gd name="csX14" fmla="*/ 135968 w 1511968"/>
+                  <a:gd name="csY14" fmla="*/ 598985 h 1722951"/>
+                  <a:gd name="csX15" fmla="*/ 129338 w 1511968"/>
+                  <a:gd name="csY15" fmla="*/ 529811 h 1722951"/>
+                  <a:gd name="csX16" fmla="*/ 74937 w 1511968"/>
+                  <a:gd name="csY16" fmla="*/ 40105 h 1722951"/>
+                  <a:gd name="csX0" fmla="*/ 74937 w 1511968"/>
+                  <a:gd name="csY0" fmla="*/ 40105 h 1722951"/>
+                  <a:gd name="csX1" fmla="*/ 443042 w 1511968"/>
+                  <a:gd name="csY1" fmla="*/ 392168 h 1722951"/>
+                  <a:gd name="csX2" fmla="*/ 531438 w 1511968"/>
+                  <a:gd name="csY2" fmla="*/ 345890 h 1722951"/>
+                  <a:gd name="csX3" fmla="*/ 683794 w 1511968"/>
+                  <a:gd name="csY3" fmla="*/ 307284 h 1722951"/>
+                  <a:gd name="csX4" fmla="*/ 844173 w 1511968"/>
+                  <a:gd name="csY4" fmla="*/ 313806 h 1722951"/>
+                  <a:gd name="csX5" fmla="*/ 970828 w 1511968"/>
+                  <a:gd name="csY5" fmla="*/ 324152 h 1722951"/>
+                  <a:gd name="csX6" fmla="*/ 1014244 w 1511968"/>
+                  <a:gd name="csY6" fmla="*/ 0 h 1722951"/>
+                  <a:gd name="csX7" fmla="*/ 1264643 w 1511968"/>
+                  <a:gd name="csY7" fmla="*/ 305222 h 1722951"/>
+                  <a:gd name="csX8" fmla="*/ 1392075 w 1511968"/>
+                  <a:gd name="csY8" fmla="*/ 622935 h 1722951"/>
+                  <a:gd name="csX9" fmla="*/ 1452559 w 1511968"/>
+                  <a:gd name="csY9" fmla="*/ 728453 h 1722951"/>
+                  <a:gd name="csX10" fmla="*/ 1511968 w 1511968"/>
+                  <a:gd name="csY10" fmla="*/ 1007096 h 1722951"/>
+                  <a:gd name="csX11" fmla="*/ 755984 w 1511968"/>
+                  <a:gd name="csY11" fmla="*/ 1722951 h 1722951"/>
+                  <a:gd name="csX12" fmla="*/ 0 w 1511968"/>
+                  <a:gd name="csY12" fmla="*/ 1007096 h 1722951"/>
+                  <a:gd name="csX13" fmla="*/ 129111 w 1511968"/>
+                  <a:gd name="csY13" fmla="*/ 606855 h 1722951"/>
+                  <a:gd name="csX14" fmla="*/ 135968 w 1511968"/>
+                  <a:gd name="csY14" fmla="*/ 598985 h 1722951"/>
+                  <a:gd name="csX15" fmla="*/ 129338 w 1511968"/>
+                  <a:gd name="csY15" fmla="*/ 529811 h 1722951"/>
+                  <a:gd name="csX16" fmla="*/ 74937 w 1511968"/>
+                  <a:gd name="csY16" fmla="*/ 40105 h 1722951"/>
+                  <a:gd name="csX0" fmla="*/ 74937 w 1511968"/>
+                  <a:gd name="csY0" fmla="*/ 40105 h 1722951"/>
+                  <a:gd name="csX1" fmla="*/ 443042 w 1511968"/>
+                  <a:gd name="csY1" fmla="*/ 392168 h 1722951"/>
+                  <a:gd name="csX2" fmla="*/ 531438 w 1511968"/>
+                  <a:gd name="csY2" fmla="*/ 345890 h 1722951"/>
+                  <a:gd name="csX3" fmla="*/ 683794 w 1511968"/>
+                  <a:gd name="csY3" fmla="*/ 307284 h 1722951"/>
+                  <a:gd name="csX4" fmla="*/ 844173 w 1511968"/>
+                  <a:gd name="csY4" fmla="*/ 313806 h 1722951"/>
+                  <a:gd name="csX5" fmla="*/ 970828 w 1511968"/>
+                  <a:gd name="csY5" fmla="*/ 324152 h 1722951"/>
+                  <a:gd name="csX6" fmla="*/ 1014244 w 1511968"/>
+                  <a:gd name="csY6" fmla="*/ 0 h 1722951"/>
+                  <a:gd name="csX7" fmla="*/ 1264643 w 1511968"/>
+                  <a:gd name="csY7" fmla="*/ 305222 h 1722951"/>
+                  <a:gd name="csX8" fmla="*/ 1071233 w 1511968"/>
+                  <a:gd name="csY8" fmla="*/ 646998 h 1722951"/>
+                  <a:gd name="csX9" fmla="*/ 1452559 w 1511968"/>
+                  <a:gd name="csY9" fmla="*/ 728453 h 1722951"/>
+                  <a:gd name="csX10" fmla="*/ 1511968 w 1511968"/>
+                  <a:gd name="csY10" fmla="*/ 1007096 h 1722951"/>
+                  <a:gd name="csX11" fmla="*/ 755984 w 1511968"/>
+                  <a:gd name="csY11" fmla="*/ 1722951 h 1722951"/>
+                  <a:gd name="csX12" fmla="*/ 0 w 1511968"/>
+                  <a:gd name="csY12" fmla="*/ 1007096 h 1722951"/>
+                  <a:gd name="csX13" fmla="*/ 129111 w 1511968"/>
+                  <a:gd name="csY13" fmla="*/ 606855 h 1722951"/>
+                  <a:gd name="csX14" fmla="*/ 135968 w 1511968"/>
+                  <a:gd name="csY14" fmla="*/ 598985 h 1722951"/>
+                  <a:gd name="csX15" fmla="*/ 129338 w 1511968"/>
+                  <a:gd name="csY15" fmla="*/ 529811 h 1722951"/>
+                  <a:gd name="csX16" fmla="*/ 74937 w 1511968"/>
+                  <a:gd name="csY16" fmla="*/ 40105 h 1722951"/>
+                  <a:gd name="csX0" fmla="*/ 74937 w 1511968"/>
+                  <a:gd name="csY0" fmla="*/ 40105 h 1722951"/>
+                  <a:gd name="csX1" fmla="*/ 443042 w 1511968"/>
+                  <a:gd name="csY1" fmla="*/ 392168 h 1722951"/>
+                  <a:gd name="csX2" fmla="*/ 531438 w 1511968"/>
+                  <a:gd name="csY2" fmla="*/ 345890 h 1722951"/>
+                  <a:gd name="csX3" fmla="*/ 683794 w 1511968"/>
+                  <a:gd name="csY3" fmla="*/ 307284 h 1722951"/>
+                  <a:gd name="csX4" fmla="*/ 844173 w 1511968"/>
+                  <a:gd name="csY4" fmla="*/ 313806 h 1722951"/>
+                  <a:gd name="csX5" fmla="*/ 970828 w 1511968"/>
+                  <a:gd name="csY5" fmla="*/ 324152 h 1722951"/>
+                  <a:gd name="csX6" fmla="*/ 1014244 w 1511968"/>
+                  <a:gd name="csY6" fmla="*/ 0 h 1722951"/>
+                  <a:gd name="csX7" fmla="*/ 1264643 w 1511968"/>
+                  <a:gd name="csY7" fmla="*/ 305222 h 1722951"/>
+                  <a:gd name="csX8" fmla="*/ 814560 w 1511968"/>
+                  <a:gd name="csY8" fmla="*/ 735229 h 1722951"/>
+                  <a:gd name="csX9" fmla="*/ 1452559 w 1511968"/>
+                  <a:gd name="csY9" fmla="*/ 728453 h 1722951"/>
+                  <a:gd name="csX10" fmla="*/ 1511968 w 1511968"/>
+                  <a:gd name="csY10" fmla="*/ 1007096 h 1722951"/>
+                  <a:gd name="csX11" fmla="*/ 755984 w 1511968"/>
+                  <a:gd name="csY11" fmla="*/ 1722951 h 1722951"/>
+                  <a:gd name="csX12" fmla="*/ 0 w 1511968"/>
+                  <a:gd name="csY12" fmla="*/ 1007096 h 1722951"/>
+                  <a:gd name="csX13" fmla="*/ 129111 w 1511968"/>
+                  <a:gd name="csY13" fmla="*/ 606855 h 1722951"/>
+                  <a:gd name="csX14" fmla="*/ 135968 w 1511968"/>
+                  <a:gd name="csY14" fmla="*/ 598985 h 1722951"/>
+                  <a:gd name="csX15" fmla="*/ 129338 w 1511968"/>
+                  <a:gd name="csY15" fmla="*/ 529811 h 1722951"/>
+                  <a:gd name="csX16" fmla="*/ 74937 w 1511968"/>
+                  <a:gd name="csY16" fmla="*/ 40105 h 1722951"/>
+                </a:gdLst>
+                <a:ahLst/>
+                <a:cxnLst>
+                  <a:cxn ang="0">
+                    <a:pos x="csX0" y="csY0"/>
+                  </a:cxn>
+                  <a:cxn ang="0">
+                    <a:pos x="csX1" y="csY1"/>
+                  </a:cxn>
+                  <a:cxn ang="0">
+                    <a:pos x="csX2" y="csY2"/>
+                  </a:cxn>
+                  <a:cxn ang="0">
+                    <a:pos x="csX3" y="csY3"/>
+                  </a:cxn>
+                  <a:cxn ang="0">
+                    <a:pos x="csX4" y="csY4"/>
+                  </a:cxn>
+                  <a:cxn ang="0">
+                    <a:pos x="csX5" y="csY5"/>
+                  </a:cxn>
+                  <a:cxn ang="0">
+                    <a:pos x="csX6" y="csY6"/>
+                  </a:cxn>
+                  <a:cxn ang="0">
+                    <a:pos x="csX7" y="csY7"/>
+                  </a:cxn>
+                  <a:cxn ang="0">
+                    <a:pos x="csX8" y="csY8"/>
+                  </a:cxn>
+                  <a:cxn ang="0">
+                    <a:pos x="csX9" y="csY9"/>
+                  </a:cxn>
+                  <a:cxn ang="0">
+                    <a:pos x="csX10" y="csY10"/>
+                  </a:cxn>
+                  <a:cxn ang="0">
+                    <a:pos x="csX11" y="csY11"/>
+                  </a:cxn>
+                  <a:cxn ang="0">
+                    <a:pos x="csX12" y="csY12"/>
+                  </a:cxn>
+                  <a:cxn ang="0">
+                    <a:pos x="csX13" y="csY13"/>
+                  </a:cxn>
+                  <a:cxn ang="0">
+                    <a:pos x="csX14" y="csY14"/>
+                  </a:cxn>
+                  <a:cxn ang="0">
+                    <a:pos x="csX15" y="csY15"/>
+                  </a:cxn>
+                  <a:cxn ang="0">
+                    <a:pos x="csX16" y="csY16"/>
+                  </a:cxn>
+                </a:cxnLst>
+                <a:rect l="l" t="t" r="r" b="b"/>
+                <a:pathLst>
+                  <a:path w="1511968" h="1722951">
+                    <a:moveTo>
+                      <a:pt x="74937" y="40105"/>
+                    </a:moveTo>
+                    <a:lnTo>
+                      <a:pt x="443042" y="392168"/>
+                    </a:lnTo>
+                    <a:lnTo>
+                      <a:pt x="531438" y="345890"/>
+                    </a:lnTo>
+                    <a:cubicBezTo>
+                      <a:pt x="580651" y="336354"/>
+                      <a:pt x="631672" y="312631"/>
+                      <a:pt x="683794" y="307284"/>
+                    </a:cubicBezTo>
+                    <a:cubicBezTo>
+                      <a:pt x="735917" y="301937"/>
+                      <a:pt x="794961" y="304270"/>
+                      <a:pt x="844173" y="313806"/>
+                    </a:cubicBezTo>
+                    <a:lnTo>
+                      <a:pt x="970828" y="324152"/>
+                    </a:lnTo>
+                    <a:lnTo>
+                      <a:pt x="1014244" y="0"/>
+                    </a:lnTo>
+                    <a:cubicBezTo>
+                      <a:pt x="1138398" y="124154"/>
+                      <a:pt x="1184433" y="134477"/>
+                      <a:pt x="1264643" y="305222"/>
+                    </a:cubicBezTo>
+                    <a:lnTo>
+                      <a:pt x="814560" y="735229"/>
+                    </a:lnTo>
+                    <a:lnTo>
+                      <a:pt x="1452559" y="728453"/>
+                    </a:lnTo>
+                    <a:cubicBezTo>
+                      <a:pt x="1490814" y="814097"/>
+                      <a:pt x="1511968" y="908257"/>
+                      <a:pt x="1511968" y="1007096"/>
+                    </a:cubicBezTo>
+                    <a:cubicBezTo>
+                      <a:pt x="1511968" y="1402452"/>
+                      <a:pt x="1173502" y="1722951"/>
+                      <a:pt x="755984" y="1722951"/>
+                    </a:cubicBezTo>
+                    <a:cubicBezTo>
+                      <a:pt x="338466" y="1722951"/>
+                      <a:pt x="0" y="1402452"/>
+                      <a:pt x="0" y="1007096"/>
+                    </a:cubicBezTo>
+                    <a:cubicBezTo>
+                      <a:pt x="0" y="858838"/>
+                      <a:pt x="47597" y="721106"/>
+                      <a:pt x="129111" y="606855"/>
+                    </a:cubicBezTo>
+                    <a:lnTo>
+                      <a:pt x="135968" y="598985"/>
+                    </a:lnTo>
+                    <a:lnTo>
+                      <a:pt x="129338" y="529811"/>
+                    </a:lnTo>
+                    <a:cubicBezTo>
+                      <a:pt x="129338" y="367087"/>
+                      <a:pt x="-49216" y="164259"/>
+                      <a:pt x="74937" y="40105"/>
+                    </a:cubicBezTo>
+                    <a:close/>
+                  </a:path>
+                </a:pathLst>
+              </a:custGeom>
+              <a:solidFill>
+                <a:srgbClr val="FFC000"/>
+              </a:solidFill>
+              <a:ln>
+                <a:noFill/>
+              </a:ln>
+            </p:spPr>
+            <p:style>
+              <a:lnRef idx="2">
+                <a:schemeClr val="accent1">
+                  <a:shade val="15000"/>
+                </a:schemeClr>
+              </a:lnRef>
+              <a:fillRef idx="1">
+                <a:schemeClr val="accent1"/>
+              </a:fillRef>
+              <a:effectRef idx="0">
+                <a:schemeClr val="accent1"/>
+              </a:effectRef>
+              <a:fontRef idx="minor">
+                <a:schemeClr val="lt1"/>
+              </a:fontRef>
+            </p:style>
+            <p:txBody>
+              <a:bodyPr wrap="square" rtlCol="0" anchor="ctr">
+                <a:noAutofit/>
+              </a:bodyPr>
+              <a:lstStyle/>
+              <a:p>
+                <a:pPr algn="ctr"/>
+                <a:endParaRPr kumimoji="1" lang="ja-JP" altLang="en-US"/>
+              </a:p>
+            </p:txBody>
+          </p:sp>
+          <p:cxnSp>
+            <p:nvCxnSpPr>
+              <p:cNvPr id="43" name="直線コネクタ 42">
+                <a:extLst>
+                  <a:ext uri="{FF2B5EF4-FFF2-40B4-BE49-F238E27FC236}">
+                    <a16:creationId xmlns:a16="http://schemas.microsoft.com/office/drawing/2014/main" id="{14E5A5D5-9EDB-8D16-25BE-8869CEAC9946}"/>
+                  </a:ext>
+                </a:extLst>
+              </p:cNvPr>
+              <p:cNvCxnSpPr/>
+              <p:nvPr/>
+            </p:nvCxnSpPr>
+            <p:spPr>
+              <a:xfrm>
+                <a:off x="3112169" y="4321073"/>
+                <a:ext cx="521368" cy="0"/>
+              </a:xfrm>
+              <a:prstGeom prst="line">
+                <a:avLst/>
+              </a:prstGeom>
+              <a:ln>
+                <a:solidFill>
+                  <a:schemeClr val="tx1"/>
+                </a:solidFill>
+              </a:ln>
+            </p:spPr>
+            <p:style>
+              <a:lnRef idx="2">
+                <a:schemeClr val="accent1"/>
+              </a:lnRef>
+              <a:fillRef idx="0">
+                <a:schemeClr val="accent1"/>
+              </a:fillRef>
+              <a:effectRef idx="1">
+                <a:schemeClr val="accent1"/>
+              </a:effectRef>
+              <a:fontRef idx="minor">
+                <a:schemeClr val="tx1"/>
+              </a:fontRef>
+            </p:style>
+          </p:cxnSp>
+          <p:cxnSp>
+            <p:nvCxnSpPr>
+              <p:cNvPr id="44" name="直線コネクタ 43">
+                <a:extLst>
+                  <a:ext uri="{FF2B5EF4-FFF2-40B4-BE49-F238E27FC236}">
+                    <a16:creationId xmlns:a16="http://schemas.microsoft.com/office/drawing/2014/main" id="{41DDDD5A-B8C5-3E6A-E0C8-521B59A32E92}"/>
+                  </a:ext>
+                </a:extLst>
+              </p:cNvPr>
+              <p:cNvCxnSpPr/>
+              <p:nvPr/>
+            </p:nvCxnSpPr>
+            <p:spPr>
+              <a:xfrm>
+                <a:off x="4431631" y="4321073"/>
+                <a:ext cx="521368" cy="0"/>
+              </a:xfrm>
+              <a:prstGeom prst="line">
+                <a:avLst/>
+              </a:prstGeom>
+              <a:ln>
+                <a:solidFill>
+                  <a:schemeClr val="tx1"/>
+                </a:solidFill>
+              </a:ln>
+            </p:spPr>
+            <p:style>
+              <a:lnRef idx="2">
+                <a:schemeClr val="accent1"/>
+              </a:lnRef>
+              <a:fillRef idx="0">
+                <a:schemeClr val="accent1"/>
+              </a:fillRef>
+              <a:effectRef idx="1">
+                <a:schemeClr val="accent1"/>
+              </a:effectRef>
+              <a:fontRef idx="minor">
+                <a:schemeClr val="tx1"/>
+              </a:fontRef>
+            </p:style>
+          </p:cxnSp>
+          <p:cxnSp>
+            <p:nvCxnSpPr>
+              <p:cNvPr id="45" name="直線コネクタ 44">
+                <a:extLst>
+                  <a:ext uri="{FF2B5EF4-FFF2-40B4-BE49-F238E27FC236}">
+                    <a16:creationId xmlns:a16="http://schemas.microsoft.com/office/drawing/2014/main" id="{7B689930-EA52-827E-0C8F-C0037BCEF1EC}"/>
+                  </a:ext>
+                </a:extLst>
+              </p:cNvPr>
+              <p:cNvCxnSpPr>
+                <a:cxnSpLocks/>
+              </p:cNvCxnSpPr>
+              <p:nvPr/>
+            </p:nvCxnSpPr>
+            <p:spPr>
+              <a:xfrm flipV="1">
+                <a:off x="3112169" y="4411579"/>
+                <a:ext cx="521368" cy="69915"/>
+              </a:xfrm>
+              <a:prstGeom prst="line">
+                <a:avLst/>
+              </a:prstGeom>
+              <a:ln>
+                <a:solidFill>
+                  <a:schemeClr val="tx1"/>
+                </a:solidFill>
+              </a:ln>
+            </p:spPr>
+            <p:style>
+              <a:lnRef idx="2">
+                <a:schemeClr val="accent1"/>
+              </a:lnRef>
+              <a:fillRef idx="0">
+                <a:schemeClr val="accent1"/>
+              </a:fillRef>
+              <a:effectRef idx="1">
+                <a:schemeClr val="accent1"/>
+              </a:effectRef>
+              <a:fontRef idx="minor">
+                <a:schemeClr val="tx1"/>
+              </a:fontRef>
+            </p:style>
+          </p:cxnSp>
+          <p:cxnSp>
+            <p:nvCxnSpPr>
+              <p:cNvPr id="46" name="直線コネクタ 45">
+                <a:extLst>
+                  <a:ext uri="{FF2B5EF4-FFF2-40B4-BE49-F238E27FC236}">
+                    <a16:creationId xmlns:a16="http://schemas.microsoft.com/office/drawing/2014/main" id="{A3357061-35A1-9132-76BB-CF1C07717C71}"/>
+                  </a:ext>
+                </a:extLst>
+              </p:cNvPr>
+              <p:cNvCxnSpPr>
+                <a:cxnSpLocks/>
+              </p:cNvCxnSpPr>
+              <p:nvPr/>
+            </p:nvCxnSpPr>
+            <p:spPr>
+              <a:xfrm>
+                <a:off x="4431631" y="4411579"/>
+                <a:ext cx="521368" cy="69915"/>
+              </a:xfrm>
+              <a:prstGeom prst="line">
+                <a:avLst/>
+              </a:prstGeom>
+              <a:ln>
+                <a:solidFill>
+                  <a:schemeClr val="tx1"/>
+                </a:solidFill>
+              </a:ln>
+            </p:spPr>
+            <p:style>
+              <a:lnRef idx="2">
+                <a:schemeClr val="accent1"/>
+              </a:lnRef>
+              <a:fillRef idx="0">
+                <a:schemeClr val="accent1"/>
+              </a:fillRef>
+              <a:effectRef idx="1">
+                <a:schemeClr val="accent1"/>
+              </a:effectRef>
+              <a:fontRef idx="minor">
+                <a:schemeClr val="tx1"/>
+              </a:fontRef>
+            </p:style>
+          </p:cxnSp>
+          <p:cxnSp>
+            <p:nvCxnSpPr>
+              <p:cNvPr id="47" name="直線コネクタ 46">
+                <a:extLst>
+                  <a:ext uri="{FF2B5EF4-FFF2-40B4-BE49-F238E27FC236}">
+                    <a16:creationId xmlns:a16="http://schemas.microsoft.com/office/drawing/2014/main" id="{6A58FEDE-500F-9D8D-14CB-DF93D4E97C8F}"/>
+                  </a:ext>
+                </a:extLst>
+              </p:cNvPr>
+              <p:cNvCxnSpPr>
+                <a:cxnSpLocks/>
+              </p:cNvCxnSpPr>
+              <p:nvPr/>
+            </p:nvCxnSpPr>
+            <p:spPr>
+              <a:xfrm>
+                <a:off x="3112169" y="4133790"/>
+                <a:ext cx="521368" cy="93305"/>
+              </a:xfrm>
+              <a:prstGeom prst="line">
+                <a:avLst/>
+              </a:prstGeom>
+              <a:ln>
+                <a:solidFill>
+                  <a:schemeClr val="tx1"/>
+                </a:solidFill>
+              </a:ln>
+            </p:spPr>
+            <p:style>
+              <a:lnRef idx="2">
+                <a:schemeClr val="accent1"/>
+              </a:lnRef>
+              <a:fillRef idx="0">
+                <a:schemeClr val="accent1"/>
+              </a:fillRef>
+              <a:effectRef idx="1">
+                <a:schemeClr val="accent1"/>
+              </a:effectRef>
+              <a:fontRef idx="minor">
+                <a:schemeClr val="tx1"/>
+              </a:fontRef>
+            </p:style>
+          </p:cxnSp>
+          <p:cxnSp>
+            <p:nvCxnSpPr>
+              <p:cNvPr id="48" name="直線コネクタ 47">
+                <a:extLst>
+                  <a:ext uri="{FF2B5EF4-FFF2-40B4-BE49-F238E27FC236}">
+                    <a16:creationId xmlns:a16="http://schemas.microsoft.com/office/drawing/2014/main" id="{20EDBA5F-7530-7D57-188D-A7F116598FA1}"/>
+                  </a:ext>
+                </a:extLst>
+              </p:cNvPr>
+              <p:cNvCxnSpPr>
+                <a:cxnSpLocks/>
+              </p:cNvCxnSpPr>
+              <p:nvPr/>
+            </p:nvCxnSpPr>
+            <p:spPr>
+              <a:xfrm flipV="1">
+                <a:off x="4431631" y="4133790"/>
+                <a:ext cx="521368" cy="93305"/>
+              </a:xfrm>
+              <a:prstGeom prst="line">
+                <a:avLst/>
+              </a:prstGeom>
+              <a:ln>
+                <a:solidFill>
+                  <a:schemeClr val="tx1"/>
+                </a:solidFill>
+              </a:ln>
+            </p:spPr>
+            <p:style>
+              <a:lnRef idx="2">
+                <a:schemeClr val="accent1"/>
+              </a:lnRef>
+              <a:fillRef idx="0">
+                <a:schemeClr val="accent1"/>
+              </a:fillRef>
+              <a:effectRef idx="1">
+                <a:schemeClr val="accent1"/>
+              </a:effectRef>
+              <a:fontRef idx="minor">
+                <a:schemeClr val="tx1"/>
+              </a:fontRef>
+            </p:style>
+          </p:cxnSp>
+        </p:grpSp>
+        <p:sp>
+          <p:nvSpPr>
+            <p:cNvPr id="40" name="円/楕円 39">
+              <a:extLst>
+                <a:ext uri="{FF2B5EF4-FFF2-40B4-BE49-F238E27FC236}">
+                  <a16:creationId xmlns:a16="http://schemas.microsoft.com/office/drawing/2014/main" id="{C0F9B228-441B-DA8A-D692-BDE4A3D3C797}"/>
+                </a:ext>
+              </a:extLst>
+            </p:cNvPr>
+            <p:cNvSpPr/>
+            <p:nvPr/>
+          </p:nvSpPr>
+          <p:spPr>
+            <a:xfrm>
+              <a:off x="3575174" y="4043006"/>
+              <a:ext cx="107320" cy="107320"/>
+            </a:xfrm>
+            <a:prstGeom prst="ellipse">
+              <a:avLst/>
+            </a:prstGeom>
+            <a:solidFill>
+              <a:schemeClr val="tx1"/>
+            </a:solidFill>
+            <a:ln>
+              <a:noFill/>
+            </a:ln>
+          </p:spPr>
+          <p:style>
+            <a:lnRef idx="2">
+              <a:schemeClr val="accent1">
+                <a:shade val="15000"/>
+              </a:schemeClr>
+            </a:lnRef>
+            <a:fillRef idx="1">
+              <a:schemeClr val="accent1"/>
+            </a:fillRef>
+            <a:effectRef idx="0">
+              <a:schemeClr val="accent1"/>
+            </a:effectRef>
+            <a:fontRef idx="minor">
+              <a:schemeClr val="lt1"/>
+            </a:fontRef>
+          </p:style>
+          <p:txBody>
+            <a:bodyPr rtlCol="0" anchor="ctr"/>
+            <a:lstStyle/>
+            <a:p>
+              <a:pPr algn="ctr"/>
+              <a:endParaRPr kumimoji="1" lang="ja-JP" altLang="en-US"/>
+            </a:p>
+          </p:txBody>
+        </p:sp>
+        <p:sp>
+          <p:nvSpPr>
+            <p:cNvPr id="41" name="円/楕円 40">
+              <a:extLst>
+                <a:ext uri="{FF2B5EF4-FFF2-40B4-BE49-F238E27FC236}">
+                  <a16:creationId xmlns:a16="http://schemas.microsoft.com/office/drawing/2014/main" id="{33C03A12-0577-75B2-2144-DEA0DEB01E3C}"/>
+                </a:ext>
+              </a:extLst>
+            </p:cNvPr>
+            <p:cNvSpPr/>
+            <p:nvPr/>
+          </p:nvSpPr>
+          <p:spPr>
+            <a:xfrm>
+              <a:off x="4040393" y="4083112"/>
+              <a:ext cx="107320" cy="107320"/>
+            </a:xfrm>
+            <a:prstGeom prst="ellipse">
+              <a:avLst/>
+            </a:prstGeom>
+            <a:solidFill>
+              <a:schemeClr val="tx1"/>
+            </a:solidFill>
+            <a:ln>
+              <a:noFill/>
+            </a:ln>
+          </p:spPr>
+          <p:style>
+            <a:lnRef idx="2">
+              <a:schemeClr val="accent1">
+                <a:shade val="15000"/>
+              </a:schemeClr>
+            </a:lnRef>
+            <a:fillRef idx="1">
+              <a:schemeClr val="accent1"/>
+            </a:fillRef>
+            <a:effectRef idx="0">
+              <a:schemeClr val="accent1"/>
+            </a:effectRef>
+            <a:fontRef idx="minor">
+              <a:schemeClr val="lt1"/>
+            </a:fontRef>
+          </p:style>
+          <p:txBody>
+            <a:bodyPr rtlCol="0" anchor="ctr"/>
+            <a:lstStyle/>
+            <a:p>
+              <a:pPr algn="ctr"/>
+              <a:endParaRPr kumimoji="1" lang="ja-JP" altLang="en-US"/>
+            </a:p>
+          </p:txBody>
+        </p:sp>
+      </p:grpSp>
+      <p:grpSp>
+        <p:nvGrpSpPr>
+          <p:cNvPr id="56" name="グループ化 55">
+            <a:extLst>
+              <a:ext uri="{FF2B5EF4-FFF2-40B4-BE49-F238E27FC236}">
+                <a16:creationId xmlns:a16="http://schemas.microsoft.com/office/drawing/2014/main" id="{3D8854E5-68B4-24E3-A3BD-E2BD2DA04B9D}"/>
+              </a:ext>
+            </a:extLst>
+          </p:cNvPr>
+          <p:cNvGrpSpPr/>
+          <p:nvPr/>
+        </p:nvGrpSpPr>
+        <p:grpSpPr>
+          <a:xfrm>
+            <a:off x="1925053" y="3288357"/>
+            <a:ext cx="1840830" cy="1642741"/>
+            <a:chOff x="1925053" y="3288357"/>
+            <a:chExt cx="1840830" cy="1642741"/>
+          </a:xfrm>
+        </p:grpSpPr>
+        <p:grpSp>
+          <p:nvGrpSpPr>
+            <p:cNvPr id="37" name="グループ化 36">
+              <a:extLst>
+                <a:ext uri="{FF2B5EF4-FFF2-40B4-BE49-F238E27FC236}">
+                  <a16:creationId xmlns:a16="http://schemas.microsoft.com/office/drawing/2014/main" id="{CCBD2F6E-D7E7-3FF3-50EC-830F20FB7B9F}"/>
+                </a:ext>
+              </a:extLst>
+            </p:cNvPr>
+            <p:cNvGrpSpPr/>
+            <p:nvPr/>
+          </p:nvGrpSpPr>
+          <p:grpSpPr>
+            <a:xfrm>
+              <a:off x="1925053" y="3288357"/>
+              <a:ext cx="1840830" cy="1642741"/>
+              <a:chOff x="2967790" y="3312420"/>
+              <a:chExt cx="1840830" cy="1642741"/>
+            </a:xfrm>
+          </p:grpSpPr>
+          <p:grpSp>
+            <p:nvGrpSpPr>
+              <p:cNvPr id="30" name="グループ化 29">
+                <a:extLst>
+                  <a:ext uri="{FF2B5EF4-FFF2-40B4-BE49-F238E27FC236}">
+                    <a16:creationId xmlns:a16="http://schemas.microsoft.com/office/drawing/2014/main" id="{050101DD-07A2-BF3D-1EAC-66B7CF68A403}"/>
+                  </a:ext>
+                </a:extLst>
+              </p:cNvPr>
+              <p:cNvGrpSpPr/>
+              <p:nvPr/>
+            </p:nvGrpSpPr>
+            <p:grpSpPr>
+              <a:xfrm>
+                <a:off x="2967790" y="3312420"/>
+                <a:ext cx="1840830" cy="1642741"/>
+                <a:chOff x="3112169" y="3312420"/>
+                <a:chExt cx="1840830" cy="1642741"/>
+              </a:xfrm>
+            </p:grpSpPr>
+            <p:sp>
+              <p:nvSpPr>
+                <p:cNvPr id="17" name="フリーフォーム 16">
+                  <a:extLst>
+                    <a:ext uri="{FF2B5EF4-FFF2-40B4-BE49-F238E27FC236}">
+                      <a16:creationId xmlns:a16="http://schemas.microsoft.com/office/drawing/2014/main" id="{06AFAC3E-BB8D-104F-1C87-53B07E4420B3}"/>
+                    </a:ext>
+                  </a:extLst>
+                </p:cNvPr>
+                <p:cNvSpPr/>
+                <p:nvPr/>
+              </p:nvSpPr>
+              <p:spPr>
+                <a:xfrm>
+                  <a:off x="3280610" y="3312420"/>
+                  <a:ext cx="1511968" cy="1642741"/>
+                </a:xfrm>
+                <a:custGeom>
+                  <a:avLst/>
+                  <a:gdLst>
+                    <a:gd name="csX0" fmla="*/ 315568 w 1511968"/>
+                    <a:gd name="csY0" fmla="*/ 0 h 1642741"/>
+                    <a:gd name="csX1" fmla="*/ 555337 w 1511968"/>
+                    <a:gd name="csY1" fmla="*/ 239769 h 1642741"/>
+                    <a:gd name="csX2" fmla="*/ 603627 w 1511968"/>
+                    <a:gd name="csY2" fmla="*/ 225575 h 1642741"/>
+                    <a:gd name="csX3" fmla="*/ 755984 w 1511968"/>
+                    <a:gd name="csY3" fmla="*/ 211031 h 1642741"/>
+                    <a:gd name="csX4" fmla="*/ 908341 w 1511968"/>
+                    <a:gd name="csY4" fmla="*/ 225575 h 1642741"/>
+                    <a:gd name="csX5" fmla="*/ 970828 w 1511968"/>
+                    <a:gd name="csY5" fmla="*/ 243942 h 1642741"/>
+                    <a:gd name="csX6" fmla="*/ 1214770 w 1511968"/>
+                    <a:gd name="csY6" fmla="*/ 0 h 1642741"/>
+                    <a:gd name="csX7" fmla="*/ 1401001 w 1511968"/>
+                    <a:gd name="csY7" fmla="*/ 449601 h 1642741"/>
+                    <a:gd name="csX8" fmla="*/ 1392075 w 1511968"/>
+                    <a:gd name="csY8" fmla="*/ 542725 h 1642741"/>
+                    <a:gd name="csX9" fmla="*/ 1452559 w 1511968"/>
+                    <a:gd name="csY9" fmla="*/ 648243 h 1642741"/>
+                    <a:gd name="csX10" fmla="*/ 1511968 w 1511968"/>
+                    <a:gd name="csY10" fmla="*/ 926886 h 1642741"/>
+                    <a:gd name="csX11" fmla="*/ 755984 w 1511968"/>
+                    <a:gd name="csY11" fmla="*/ 1642741 h 1642741"/>
+                    <a:gd name="csX12" fmla="*/ 0 w 1511968"/>
+                    <a:gd name="csY12" fmla="*/ 926886 h 1642741"/>
+                    <a:gd name="csX13" fmla="*/ 129111 w 1511968"/>
+                    <a:gd name="csY13" fmla="*/ 526645 h 1642741"/>
+                    <a:gd name="csX14" fmla="*/ 135968 w 1511968"/>
+                    <a:gd name="csY14" fmla="*/ 518775 h 1642741"/>
+                    <a:gd name="csX15" fmla="*/ 129338 w 1511968"/>
+                    <a:gd name="csY15" fmla="*/ 449601 h 1642741"/>
+                    <a:gd name="csX16" fmla="*/ 315568 w 1511968"/>
+                    <a:gd name="csY16" fmla="*/ 0 h 1642741"/>
+                  </a:gdLst>
+                  <a:ahLst/>
+                  <a:cxnLst>
+                    <a:cxn ang="0">
+                      <a:pos x="csX0" y="csY0"/>
+                    </a:cxn>
+                    <a:cxn ang="0">
+                      <a:pos x="csX1" y="csY1"/>
+                    </a:cxn>
+                    <a:cxn ang="0">
+                      <a:pos x="csX2" y="csY2"/>
+                    </a:cxn>
+                    <a:cxn ang="0">
+                      <a:pos x="csX3" y="csY3"/>
+                    </a:cxn>
+                    <a:cxn ang="0">
+                      <a:pos x="csX4" y="csY4"/>
+                    </a:cxn>
+                    <a:cxn ang="0">
+                      <a:pos x="csX5" y="csY5"/>
+                    </a:cxn>
+                    <a:cxn ang="0">
+                      <a:pos x="csX6" y="csY6"/>
+                    </a:cxn>
+                    <a:cxn ang="0">
+                      <a:pos x="csX7" y="csY7"/>
+                    </a:cxn>
+                    <a:cxn ang="0">
+                      <a:pos x="csX8" y="csY8"/>
+                    </a:cxn>
+                    <a:cxn ang="0">
+                      <a:pos x="csX9" y="csY9"/>
+                    </a:cxn>
+                    <a:cxn ang="0">
+                      <a:pos x="csX10" y="csY10"/>
+                    </a:cxn>
+                    <a:cxn ang="0">
+                      <a:pos x="csX11" y="csY11"/>
+                    </a:cxn>
+                    <a:cxn ang="0">
+                      <a:pos x="csX12" y="csY12"/>
+                    </a:cxn>
+                    <a:cxn ang="0">
+                      <a:pos x="csX13" y="csY13"/>
+                    </a:cxn>
+                    <a:cxn ang="0">
+                      <a:pos x="csX14" y="csY14"/>
+                    </a:cxn>
+                    <a:cxn ang="0">
+                      <a:pos x="csX15" y="csY15"/>
+                    </a:cxn>
+                    <a:cxn ang="0">
+                      <a:pos x="csX16" y="csY16"/>
+                    </a:cxn>
+                  </a:cxnLst>
+                  <a:rect l="l" t="t" r="r" b="b"/>
+                  <a:pathLst>
+                    <a:path w="1511968" h="1642741">
+                      <a:moveTo>
+                        <a:pt x="315568" y="0"/>
+                      </a:moveTo>
+                      <a:lnTo>
+                        <a:pt x="555337" y="239769"/>
+                      </a:lnTo>
+                      <a:lnTo>
+                        <a:pt x="603627" y="225575"/>
+                      </a:lnTo>
+                      <a:cubicBezTo>
+                        <a:pt x="652840" y="216039"/>
+                        <a:pt x="703794" y="211031"/>
+                        <a:pt x="755984" y="211031"/>
+                      </a:cubicBezTo>
+                      <a:cubicBezTo>
+                        <a:pt x="808174" y="211031"/>
+                        <a:pt x="859129" y="216039"/>
+                        <a:pt x="908341" y="225575"/>
+                      </a:cubicBezTo>
+                      <a:lnTo>
+                        <a:pt x="970828" y="243942"/>
+                      </a:lnTo>
+                      <a:lnTo>
+                        <a:pt x="1214770" y="0"/>
+                      </a:lnTo>
+                      <a:cubicBezTo>
+                        <a:pt x="1338924" y="124154"/>
+                        <a:pt x="1401001" y="286877"/>
+                        <a:pt x="1401001" y="449601"/>
+                      </a:cubicBezTo>
+                      <a:lnTo>
+                        <a:pt x="1392075" y="542725"/>
+                      </a:lnTo>
+                      <a:lnTo>
+                        <a:pt x="1452559" y="648243"/>
+                      </a:lnTo>
+                      <a:cubicBezTo>
+                        <a:pt x="1490814" y="733887"/>
+                        <a:pt x="1511968" y="828047"/>
+                        <a:pt x="1511968" y="926886"/>
+                      </a:cubicBezTo>
+                      <a:cubicBezTo>
+                        <a:pt x="1511968" y="1322242"/>
+                        <a:pt x="1173502" y="1642741"/>
+                        <a:pt x="755984" y="1642741"/>
+                      </a:cubicBezTo>
+                      <a:cubicBezTo>
+                        <a:pt x="338466" y="1642741"/>
+                        <a:pt x="0" y="1322242"/>
+                        <a:pt x="0" y="926886"/>
+                      </a:cubicBezTo>
+                      <a:cubicBezTo>
+                        <a:pt x="0" y="778628"/>
+                        <a:pt x="47597" y="640896"/>
+                        <a:pt x="129111" y="526645"/>
+                      </a:cubicBezTo>
+                      <a:lnTo>
+                        <a:pt x="135968" y="518775"/>
+                      </a:lnTo>
+                      <a:lnTo>
+                        <a:pt x="129338" y="449601"/>
+                      </a:lnTo>
+                      <a:cubicBezTo>
+                        <a:pt x="129338" y="286877"/>
+                        <a:pt x="191415" y="124154"/>
+                        <a:pt x="315568" y="0"/>
+                      </a:cubicBezTo>
+                      <a:close/>
+                    </a:path>
+                  </a:pathLst>
+                </a:custGeom>
+                <a:solidFill>
+                  <a:srgbClr val="FFC000"/>
+                </a:solidFill>
+                <a:ln>
+                  <a:noFill/>
+                </a:ln>
+              </p:spPr>
+              <p:style>
+                <a:lnRef idx="2">
+                  <a:schemeClr val="accent1">
+                    <a:shade val="15000"/>
+                  </a:schemeClr>
+                </a:lnRef>
+                <a:fillRef idx="1">
+                  <a:schemeClr val="accent1"/>
+                </a:fillRef>
+                <a:effectRef idx="0">
+                  <a:schemeClr val="accent1"/>
+                </a:effectRef>
+                <a:fontRef idx="minor">
+                  <a:schemeClr val="lt1"/>
+                </a:fontRef>
+              </p:style>
+              <p:txBody>
+                <a:bodyPr wrap="square" rtlCol="0" anchor="ctr">
+                  <a:noAutofit/>
+                </a:bodyPr>
+                <a:lstStyle/>
+                <a:p>
+                  <a:pPr algn="ctr"/>
+                  <a:endParaRPr kumimoji="1" lang="ja-JP" altLang="en-US"/>
+                </a:p>
+              </p:txBody>
+            </p:sp>
+            <p:cxnSp>
+              <p:nvCxnSpPr>
+                <p:cNvPr id="19" name="直線コネクタ 18">
+                  <a:extLst>
+                    <a:ext uri="{FF2B5EF4-FFF2-40B4-BE49-F238E27FC236}">
+                      <a16:creationId xmlns:a16="http://schemas.microsoft.com/office/drawing/2014/main" id="{C6B99CED-6DBF-ED45-D8DB-ABD59FB3515C}"/>
+                    </a:ext>
+                  </a:extLst>
+                </p:cNvPr>
+                <p:cNvCxnSpPr/>
+                <p:nvPr/>
+              </p:nvCxnSpPr>
+              <p:spPr>
+                <a:xfrm>
+                  <a:off x="3112169" y="4321073"/>
+                  <a:ext cx="521368" cy="0"/>
+                </a:xfrm>
+                <a:prstGeom prst="line">
+                  <a:avLst/>
+                </a:prstGeom>
+                <a:ln>
+                  <a:solidFill>
+                    <a:schemeClr val="tx1"/>
+                  </a:solidFill>
+                </a:ln>
+              </p:spPr>
+              <p:style>
+                <a:lnRef idx="2">
+                  <a:schemeClr val="accent1"/>
+                </a:lnRef>
+                <a:fillRef idx="0">
+                  <a:schemeClr val="accent1"/>
+                </a:fillRef>
+                <a:effectRef idx="1">
+                  <a:schemeClr val="accent1"/>
+                </a:effectRef>
+                <a:fontRef idx="minor">
+                  <a:schemeClr val="tx1"/>
+                </a:fontRef>
+              </p:style>
+            </p:cxnSp>
+            <p:cxnSp>
+              <p:nvCxnSpPr>
+                <p:cNvPr id="20" name="直線コネクタ 19">
+                  <a:extLst>
+                    <a:ext uri="{FF2B5EF4-FFF2-40B4-BE49-F238E27FC236}">
+                      <a16:creationId xmlns:a16="http://schemas.microsoft.com/office/drawing/2014/main" id="{9ED8CB32-A7D6-0F94-5DE3-6F7DA52AAFC1}"/>
+                    </a:ext>
+                  </a:extLst>
+                </p:cNvPr>
+                <p:cNvCxnSpPr/>
+                <p:nvPr/>
+              </p:nvCxnSpPr>
+              <p:spPr>
+                <a:xfrm>
+                  <a:off x="4431631" y="4321073"/>
+                  <a:ext cx="521368" cy="0"/>
+                </a:xfrm>
+                <a:prstGeom prst="line">
+                  <a:avLst/>
+                </a:prstGeom>
+                <a:ln>
+                  <a:solidFill>
+                    <a:schemeClr val="tx1"/>
+                  </a:solidFill>
+                </a:ln>
+              </p:spPr>
+              <p:style>
+                <a:lnRef idx="2">
+                  <a:schemeClr val="accent1"/>
+                </a:lnRef>
+                <a:fillRef idx="0">
+                  <a:schemeClr val="accent1"/>
+                </a:fillRef>
+                <a:effectRef idx="1">
+                  <a:schemeClr val="accent1"/>
+                </a:effectRef>
+                <a:fontRef idx="minor">
+                  <a:schemeClr val="tx1"/>
+                </a:fontRef>
+              </p:style>
+            </p:cxnSp>
+            <p:cxnSp>
+              <p:nvCxnSpPr>
+                <p:cNvPr id="21" name="直線コネクタ 20">
+                  <a:extLst>
+                    <a:ext uri="{FF2B5EF4-FFF2-40B4-BE49-F238E27FC236}">
+                      <a16:creationId xmlns:a16="http://schemas.microsoft.com/office/drawing/2014/main" id="{2923AB8E-3B41-C042-9993-26B8B4B4E752}"/>
+                    </a:ext>
+                  </a:extLst>
+                </p:cNvPr>
+                <p:cNvCxnSpPr>
+                  <a:cxnSpLocks/>
+                </p:cNvCxnSpPr>
+                <p:nvPr/>
+              </p:nvCxnSpPr>
+              <p:spPr>
+                <a:xfrm flipV="1">
+                  <a:off x="3112169" y="4411579"/>
+                  <a:ext cx="521368" cy="69915"/>
+                </a:xfrm>
+                <a:prstGeom prst="line">
+                  <a:avLst/>
+                </a:prstGeom>
+                <a:ln>
+                  <a:solidFill>
+                    <a:schemeClr val="tx1"/>
+                  </a:solidFill>
+                </a:ln>
+              </p:spPr>
+              <p:style>
+                <a:lnRef idx="2">
+                  <a:schemeClr val="accent1"/>
+                </a:lnRef>
+                <a:fillRef idx="0">
+                  <a:schemeClr val="accent1"/>
+                </a:fillRef>
+                <a:effectRef idx="1">
+                  <a:schemeClr val="accent1"/>
+                </a:effectRef>
+                <a:fontRef idx="minor">
+                  <a:schemeClr val="tx1"/>
+                </a:fontRef>
+              </p:style>
+            </p:cxnSp>
+            <p:cxnSp>
+              <p:nvCxnSpPr>
+                <p:cNvPr id="22" name="直線コネクタ 21">
+                  <a:extLst>
+                    <a:ext uri="{FF2B5EF4-FFF2-40B4-BE49-F238E27FC236}">
+                      <a16:creationId xmlns:a16="http://schemas.microsoft.com/office/drawing/2014/main" id="{3D1D793D-F5F1-A62B-464F-6CE0A59A7088}"/>
+                    </a:ext>
+                  </a:extLst>
+                </p:cNvPr>
+                <p:cNvCxnSpPr>
+                  <a:cxnSpLocks/>
+                </p:cNvCxnSpPr>
+                <p:nvPr/>
+              </p:nvCxnSpPr>
+              <p:spPr>
+                <a:xfrm>
+                  <a:off x="4431631" y="4411579"/>
+                  <a:ext cx="521368" cy="69915"/>
+                </a:xfrm>
+                <a:prstGeom prst="line">
+                  <a:avLst/>
+                </a:prstGeom>
+                <a:ln>
+                  <a:solidFill>
+                    <a:schemeClr val="tx1"/>
+                  </a:solidFill>
+                </a:ln>
+              </p:spPr>
+              <p:style>
+                <a:lnRef idx="2">
+                  <a:schemeClr val="accent1"/>
+                </a:lnRef>
+                <a:fillRef idx="0">
+                  <a:schemeClr val="accent1"/>
+                </a:fillRef>
+                <a:effectRef idx="1">
+                  <a:schemeClr val="accent1"/>
+                </a:effectRef>
+                <a:fontRef idx="minor">
+                  <a:schemeClr val="tx1"/>
+                </a:fontRef>
+              </p:style>
+            </p:cxnSp>
+            <p:cxnSp>
+              <p:nvCxnSpPr>
+                <p:cNvPr id="23" name="直線コネクタ 22">
+                  <a:extLst>
+                    <a:ext uri="{FF2B5EF4-FFF2-40B4-BE49-F238E27FC236}">
+                      <a16:creationId xmlns:a16="http://schemas.microsoft.com/office/drawing/2014/main" id="{CD470FB4-4729-215E-7B03-1D83A73D0252}"/>
+                    </a:ext>
+                  </a:extLst>
+                </p:cNvPr>
+                <p:cNvCxnSpPr>
+                  <a:cxnSpLocks/>
+                </p:cNvCxnSpPr>
+                <p:nvPr/>
+              </p:nvCxnSpPr>
+              <p:spPr>
+                <a:xfrm>
+                  <a:off x="3112169" y="4133790"/>
+                  <a:ext cx="521368" cy="93305"/>
+                </a:xfrm>
+                <a:prstGeom prst="line">
+                  <a:avLst/>
+                </a:prstGeom>
+                <a:ln>
+                  <a:solidFill>
+                    <a:schemeClr val="tx1"/>
+                  </a:solidFill>
+                </a:ln>
+              </p:spPr>
+              <p:style>
+                <a:lnRef idx="2">
+                  <a:schemeClr val="accent1"/>
+                </a:lnRef>
+                <a:fillRef idx="0">
+                  <a:schemeClr val="accent1"/>
+                </a:fillRef>
+                <a:effectRef idx="1">
+                  <a:schemeClr val="accent1"/>
+                </a:effectRef>
+                <a:fontRef idx="minor">
+                  <a:schemeClr val="tx1"/>
+                </a:fontRef>
+              </p:style>
+            </p:cxnSp>
+            <p:cxnSp>
+              <p:nvCxnSpPr>
+                <p:cNvPr id="24" name="直線コネクタ 23">
+                  <a:extLst>
+                    <a:ext uri="{FF2B5EF4-FFF2-40B4-BE49-F238E27FC236}">
+                      <a16:creationId xmlns:a16="http://schemas.microsoft.com/office/drawing/2014/main" id="{9C1D60A1-7DB3-046E-DF89-F649004E8C58}"/>
+                    </a:ext>
+                  </a:extLst>
+                </p:cNvPr>
+                <p:cNvCxnSpPr>
+                  <a:cxnSpLocks/>
+                </p:cNvCxnSpPr>
+                <p:nvPr/>
+              </p:nvCxnSpPr>
+              <p:spPr>
+                <a:xfrm flipV="1">
+                  <a:off x="4431631" y="4133790"/>
+                  <a:ext cx="521368" cy="93305"/>
+                </a:xfrm>
+                <a:prstGeom prst="line">
+                  <a:avLst/>
+                </a:prstGeom>
+                <a:ln>
+                  <a:solidFill>
+                    <a:schemeClr val="tx1"/>
+                  </a:solidFill>
+                </a:ln>
+              </p:spPr>
+              <p:style>
+                <a:lnRef idx="2">
+                  <a:schemeClr val="accent1"/>
+                </a:lnRef>
+                <a:fillRef idx="0">
+                  <a:schemeClr val="accent1"/>
+                </a:fillRef>
+                <a:effectRef idx="1">
+                  <a:schemeClr val="accent1"/>
+                </a:effectRef>
+                <a:fontRef idx="minor">
+                  <a:schemeClr val="tx1"/>
+                </a:fontRef>
+              </p:style>
+            </p:cxnSp>
+          </p:grpSp>
+          <p:sp>
+            <p:nvSpPr>
+              <p:cNvPr id="35" name="円/楕円 34">
+                <a:extLst>
+                  <a:ext uri="{FF2B5EF4-FFF2-40B4-BE49-F238E27FC236}">
+                    <a16:creationId xmlns:a16="http://schemas.microsoft.com/office/drawing/2014/main" id="{5368F931-F5BB-49FF-823C-C31642DD48C2}"/>
+                  </a:ext>
+                </a:extLst>
+              </p:cNvPr>
+              <p:cNvSpPr/>
+              <p:nvPr/>
+            </p:nvSpPr>
+            <p:spPr>
+              <a:xfrm>
+                <a:off x="3575174" y="3970817"/>
+                <a:ext cx="107320" cy="107320"/>
+              </a:xfrm>
+              <a:prstGeom prst="ellipse">
+                <a:avLst/>
+              </a:prstGeom>
+              <a:solidFill>
+                <a:schemeClr val="tx1"/>
+              </a:solidFill>
+              <a:ln>
+                <a:noFill/>
+              </a:ln>
+            </p:spPr>
+            <p:style>
+              <a:lnRef idx="2">
+                <a:schemeClr val="accent1">
+                  <a:shade val="15000"/>
+                </a:schemeClr>
+              </a:lnRef>
+              <a:fillRef idx="1">
+                <a:schemeClr val="accent1"/>
+              </a:fillRef>
+              <a:effectRef idx="0">
+                <a:schemeClr val="accent1"/>
+              </a:effectRef>
+              <a:fontRef idx="minor">
+                <a:schemeClr val="lt1"/>
+              </a:fontRef>
+            </p:style>
+            <p:txBody>
+              <a:bodyPr rtlCol="0" anchor="ctr"/>
+              <a:lstStyle/>
+              <a:p>
+                <a:pPr algn="ctr"/>
+                <a:endParaRPr kumimoji="1" lang="ja-JP" altLang="en-US"/>
+              </a:p>
+            </p:txBody>
+          </p:sp>
+          <p:sp>
+            <p:nvSpPr>
+              <p:cNvPr id="36" name="円/楕円 35">
+                <a:extLst>
+                  <a:ext uri="{FF2B5EF4-FFF2-40B4-BE49-F238E27FC236}">
+                    <a16:creationId xmlns:a16="http://schemas.microsoft.com/office/drawing/2014/main" id="{606C6CD5-8FF1-B72A-0132-A41F7EDFE840}"/>
+                  </a:ext>
+                </a:extLst>
+              </p:cNvPr>
+              <p:cNvSpPr/>
+              <p:nvPr/>
+            </p:nvSpPr>
+            <p:spPr>
+              <a:xfrm>
+                <a:off x="4080498" y="3978839"/>
+                <a:ext cx="107320" cy="107320"/>
+              </a:xfrm>
+              <a:prstGeom prst="ellipse">
+                <a:avLst/>
+              </a:prstGeom>
+              <a:solidFill>
+                <a:schemeClr val="tx1"/>
+              </a:solidFill>
+              <a:ln>
+                <a:noFill/>
+              </a:ln>
+            </p:spPr>
+            <p:style>
+              <a:lnRef idx="2">
+                <a:schemeClr val="accent1">
+                  <a:shade val="15000"/>
+                </a:schemeClr>
+              </a:lnRef>
+              <a:fillRef idx="1">
+                <a:schemeClr val="accent1"/>
+              </a:fillRef>
+              <a:effectRef idx="0">
+                <a:schemeClr val="accent1"/>
+              </a:effectRef>
+              <a:fontRef idx="minor">
+                <a:schemeClr val="lt1"/>
+              </a:fontRef>
+            </p:style>
+            <p:txBody>
+              <a:bodyPr rtlCol="0" anchor="ctr"/>
+              <a:lstStyle/>
+              <a:p>
+                <a:pPr algn="ctr"/>
+                <a:endParaRPr kumimoji="1" lang="ja-JP" altLang="en-US"/>
+              </a:p>
+            </p:txBody>
+          </p:sp>
+        </p:grpSp>
+        <p:cxnSp>
+          <p:nvCxnSpPr>
+            <p:cNvPr id="49" name="直線コネクタ 48">
+              <a:extLst>
+                <a:ext uri="{FF2B5EF4-FFF2-40B4-BE49-F238E27FC236}">
+                  <a16:creationId xmlns:a16="http://schemas.microsoft.com/office/drawing/2014/main" id="{55304A54-EBA0-79BA-EDDF-555FDE017AA0}"/>
+                </a:ext>
+              </a:extLst>
+            </p:cNvPr>
+            <p:cNvCxnSpPr>
+              <a:cxnSpLocks/>
+            </p:cNvCxnSpPr>
+            <p:nvPr/>
+          </p:nvCxnSpPr>
+          <p:spPr>
+            <a:xfrm flipH="1">
+              <a:off x="2751783" y="4330521"/>
+              <a:ext cx="188283" cy="117558"/>
+            </a:xfrm>
+            <a:prstGeom prst="line">
+              <a:avLst/>
+            </a:prstGeom>
+            <a:ln>
+              <a:solidFill>
+                <a:schemeClr val="tx1"/>
+              </a:solidFill>
+            </a:ln>
+          </p:spPr>
+          <p:style>
+            <a:lnRef idx="2">
+              <a:schemeClr val="accent1"/>
+            </a:lnRef>
+            <a:fillRef idx="0">
+              <a:schemeClr val="accent1"/>
+            </a:fillRef>
+            <a:effectRef idx="1">
+              <a:schemeClr val="accent1"/>
+            </a:effectRef>
+            <a:fontRef idx="minor">
+              <a:schemeClr val="tx1"/>
+            </a:fontRef>
+          </p:style>
+        </p:cxnSp>
+        <p:cxnSp>
+          <p:nvCxnSpPr>
+            <p:cNvPr id="54" name="直線コネクタ 53">
+              <a:extLst>
+                <a:ext uri="{FF2B5EF4-FFF2-40B4-BE49-F238E27FC236}">
+                  <a16:creationId xmlns:a16="http://schemas.microsoft.com/office/drawing/2014/main" id="{9DBC7D6E-99DF-01BD-A4E8-A744E48189FF}"/>
+                </a:ext>
+              </a:extLst>
+            </p:cNvPr>
+            <p:cNvCxnSpPr>
+              <a:cxnSpLocks/>
+            </p:cNvCxnSpPr>
+            <p:nvPr/>
+          </p:nvCxnSpPr>
+          <p:spPr>
+            <a:xfrm flipH="1" flipV="1">
+              <a:off x="2743062" y="4317080"/>
+              <a:ext cx="187238" cy="130999"/>
+            </a:xfrm>
+            <a:prstGeom prst="line">
+              <a:avLst/>
+            </a:prstGeom>
+            <a:ln>
+              <a:solidFill>
+                <a:schemeClr val="tx1"/>
+              </a:solidFill>
+            </a:ln>
+          </p:spPr>
+          <p:style>
+            <a:lnRef idx="2">
+              <a:schemeClr val="accent1"/>
+            </a:lnRef>
+            <a:fillRef idx="0">
+              <a:schemeClr val="accent1"/>
+            </a:fillRef>
+            <a:effectRef idx="1">
+              <a:schemeClr val="accent1"/>
+            </a:effectRef>
+            <a:fontRef idx="minor">
+              <a:schemeClr val="tx1"/>
+            </a:fontRef>
+          </p:style>
+        </p:cxnSp>
+      </p:grpSp>
+      <p:sp>
+        <p:nvSpPr>
+          <p:cNvPr id="58" name="三角形 57">
+            <a:extLst>
+              <a:ext uri="{FF2B5EF4-FFF2-40B4-BE49-F238E27FC236}">
+                <a16:creationId xmlns:a16="http://schemas.microsoft.com/office/drawing/2014/main" id="{3ACB73AA-FDF3-360D-128B-0F2C8C1F5807}"/>
+              </a:ext>
+            </a:extLst>
+          </p:cNvPr>
+          <p:cNvSpPr/>
+          <p:nvPr/>
+        </p:nvSpPr>
+        <p:spPr>
+          <a:xfrm rot="8100000">
+            <a:off x="6208293" y="3620254"/>
+            <a:ext cx="304800" cy="139443"/>
+          </a:xfrm>
+          <a:prstGeom prst="triangle">
+            <a:avLst/>
+          </a:prstGeom>
+          <a:solidFill>
+            <a:schemeClr val="bg2"/>
+          </a:solidFill>
+          <a:ln>
+            <a:solidFill>
+              <a:schemeClr val="tx1"/>
+            </a:solidFill>
+          </a:ln>
+        </p:spPr>
+        <p:style>
+          <a:lnRef idx="2">
+            <a:schemeClr val="accent1">
+              <a:shade val="15000"/>
+            </a:schemeClr>
+          </a:lnRef>
+          <a:fillRef idx="1">
+            <a:schemeClr val="accent1"/>
+          </a:fillRef>
+          <a:effectRef idx="0">
+            <a:schemeClr val="accent1"/>
+          </a:effectRef>
+          <a:fontRef idx="minor">
+            <a:schemeClr val="lt1"/>
+          </a:fontRef>
+        </p:style>
+        <p:txBody>
+          <a:bodyPr rtlCol="0" anchor="ctr"/>
+          <a:lstStyle/>
+          <a:p>
+            <a:pPr algn="ctr"/>
+            <a:endParaRPr kumimoji="1" lang="ja-JP" altLang="en-US"/>
+          </a:p>
+        </p:txBody>
+      </p:sp>
+      <p:sp>
+        <p:nvSpPr>
+          <p:cNvPr id="59" name="三角形 58">
+            <a:extLst>
+              <a:ext uri="{FF2B5EF4-FFF2-40B4-BE49-F238E27FC236}">
+                <a16:creationId xmlns:a16="http://schemas.microsoft.com/office/drawing/2014/main" id="{DDD1D02D-9AC6-6250-B78F-472A8C6DB4D6}"/>
+              </a:ext>
+            </a:extLst>
+          </p:cNvPr>
+          <p:cNvSpPr/>
+          <p:nvPr/>
+        </p:nvSpPr>
+        <p:spPr>
+          <a:xfrm rot="8100000">
+            <a:off x="6025750" y="3801379"/>
+            <a:ext cx="304800" cy="139443"/>
+          </a:xfrm>
+          <a:prstGeom prst="triangle">
+            <a:avLst/>
+          </a:prstGeom>
+          <a:solidFill>
+            <a:schemeClr val="bg2"/>
+          </a:solidFill>
+          <a:ln>
+            <a:solidFill>
+              <a:schemeClr val="tx1"/>
+            </a:solidFill>
+          </a:ln>
+        </p:spPr>
+        <p:style>
+          <a:lnRef idx="2">
+            <a:schemeClr val="accent1">
+              <a:shade val="15000"/>
+            </a:schemeClr>
+          </a:lnRef>
+          <a:fillRef idx="1">
+            <a:schemeClr val="accent1"/>
+          </a:fillRef>
+          <a:effectRef idx="0">
+            <a:schemeClr val="accent1"/>
+          </a:effectRef>
+          <a:fontRef idx="minor">
+            <a:schemeClr val="lt1"/>
+          </a:fontRef>
+        </p:style>
+        <p:txBody>
+          <a:bodyPr rtlCol="0" anchor="ctr"/>
+          <a:lstStyle/>
+          <a:p>
+            <a:pPr algn="ctr"/>
+            <a:endParaRPr kumimoji="1" lang="ja-JP" altLang="en-US"/>
+          </a:p>
+        </p:txBody>
+      </p:sp>
+      <p:sp>
+        <p:nvSpPr>
+          <p:cNvPr id="60" name="三角形 59">
+            <a:extLst>
+              <a:ext uri="{FF2B5EF4-FFF2-40B4-BE49-F238E27FC236}">
+                <a16:creationId xmlns:a16="http://schemas.microsoft.com/office/drawing/2014/main" id="{464ECEE3-7599-40CD-6388-0311AA8E334D}"/>
+              </a:ext>
+            </a:extLst>
+          </p:cNvPr>
+          <p:cNvSpPr/>
+          <p:nvPr/>
+        </p:nvSpPr>
+        <p:spPr>
+          <a:xfrm>
+            <a:off x="6429525" y="4049463"/>
+            <a:ext cx="304800" cy="139443"/>
+          </a:xfrm>
+          <a:prstGeom prst="triangle">
+            <a:avLst/>
+          </a:prstGeom>
+          <a:solidFill>
+            <a:schemeClr val="bg2"/>
+          </a:solidFill>
+          <a:ln>
+            <a:solidFill>
+              <a:schemeClr val="tx1"/>
+            </a:solidFill>
+          </a:ln>
+        </p:spPr>
+        <p:style>
+          <a:lnRef idx="2">
+            <a:schemeClr val="accent1">
+              <a:shade val="15000"/>
+            </a:schemeClr>
+          </a:lnRef>
+          <a:fillRef idx="1">
+            <a:schemeClr val="accent1"/>
+          </a:fillRef>
+          <a:effectRef idx="0">
+            <a:schemeClr val="accent1"/>
+          </a:effectRef>
+          <a:fontRef idx="minor">
+            <a:schemeClr val="lt1"/>
+          </a:fontRef>
+        </p:style>
+        <p:txBody>
+          <a:bodyPr rtlCol="0" anchor="ctr"/>
+          <a:lstStyle/>
+          <a:p>
+            <a:pPr algn="ctr"/>
+            <a:endParaRPr kumimoji="1" lang="ja-JP" altLang="en-US"/>
+          </a:p>
+        </p:txBody>
+      </p:sp>
+      <p:sp>
+        <p:nvSpPr>
+          <p:cNvPr id="61" name="三角形 60">
+            <a:extLst>
+              <a:ext uri="{FF2B5EF4-FFF2-40B4-BE49-F238E27FC236}">
+                <a16:creationId xmlns:a16="http://schemas.microsoft.com/office/drawing/2014/main" id="{77A790AB-AE79-3A28-3A00-3AF1C3851954}"/>
+              </a:ext>
+            </a:extLst>
+          </p:cNvPr>
+          <p:cNvSpPr/>
+          <p:nvPr/>
+        </p:nvSpPr>
+        <p:spPr>
+          <a:xfrm>
+            <a:off x="6156812" y="4049464"/>
+            <a:ext cx="304800" cy="139443"/>
+          </a:xfrm>
+          <a:prstGeom prst="triangle">
+            <a:avLst/>
+          </a:prstGeom>
+          <a:solidFill>
+            <a:schemeClr val="bg2"/>
+          </a:solidFill>
+          <a:ln>
+            <a:solidFill>
+              <a:schemeClr val="tx1"/>
+            </a:solidFill>
+          </a:ln>
+        </p:spPr>
+        <p:style>
+          <a:lnRef idx="2">
+            <a:schemeClr val="accent1">
+              <a:shade val="15000"/>
+            </a:schemeClr>
+          </a:lnRef>
+          <a:fillRef idx="1">
+            <a:schemeClr val="accent1"/>
+          </a:fillRef>
+          <a:effectRef idx="0">
+            <a:schemeClr val="accent1"/>
+          </a:effectRef>
+          <a:fontRef idx="minor">
+            <a:schemeClr val="lt1"/>
+          </a:fontRef>
+        </p:style>
+        <p:txBody>
+          <a:bodyPr rtlCol="0" anchor="ctr"/>
+          <a:lstStyle/>
+          <a:p>
+            <a:pPr algn="ctr"/>
+            <a:endParaRPr kumimoji="1" lang="ja-JP" altLang="en-US"/>
+          </a:p>
+        </p:txBody>
+      </p:sp>
     </p:spTree>
     <p:extLst>
       <p:ext uri="{BB962C8B-B14F-4D97-AF65-F5344CB8AC3E}">
